--- a/docs/文书/系统架构.pptx
+++ b/docs/文书/系统架构.pptx
@@ -104,6 +104,11 @@
       </a:defRPr>
     </a:lvl9pPr>
   </p:defaultTextStyle>
+  <p:extLst>
+    <p:ext uri="{EFAFB233-063F-42B5-8137-9DF3F51BA10A}">
+      <p15:sldGuideLst xmlns:p15="http://schemas.microsoft.com/office/powerpoint/2012/main"/>
+    </p:ext>
+  </p:extLst>
 </p:presentation>
 </file>
 
@@ -254,7 +259,7 @@
           <a:p>
             <a:fld id="{16F1CE54-7B3F-448E-ACC3-646806B7FDC1}" type="datetimeFigureOut">
               <a:rPr lang="zh-CN" altLang="en-US" smtClean="0"/>
-              <a:t>2025/10/12</a:t>
+              <a:t>2026/2/10</a:t>
             </a:fld>
             <a:endParaRPr lang="zh-CN" altLang="en-US"/>
           </a:p>
@@ -452,7 +457,7 @@
           <a:p>
             <a:fld id="{16F1CE54-7B3F-448E-ACC3-646806B7FDC1}" type="datetimeFigureOut">
               <a:rPr lang="zh-CN" altLang="en-US" smtClean="0"/>
-              <a:t>2025/10/12</a:t>
+              <a:t>2026/2/10</a:t>
             </a:fld>
             <a:endParaRPr lang="zh-CN" altLang="en-US"/>
           </a:p>
@@ -660,7 +665,7 @@
           <a:p>
             <a:fld id="{16F1CE54-7B3F-448E-ACC3-646806B7FDC1}" type="datetimeFigureOut">
               <a:rPr lang="zh-CN" altLang="en-US" smtClean="0"/>
-              <a:t>2025/10/12</a:t>
+              <a:t>2026/2/10</a:t>
             </a:fld>
             <a:endParaRPr lang="zh-CN" altLang="en-US"/>
           </a:p>
@@ -858,7 +863,7 @@
           <a:p>
             <a:fld id="{16F1CE54-7B3F-448E-ACC3-646806B7FDC1}" type="datetimeFigureOut">
               <a:rPr lang="zh-CN" altLang="en-US" smtClean="0"/>
-              <a:t>2025/10/12</a:t>
+              <a:t>2026/2/10</a:t>
             </a:fld>
             <a:endParaRPr lang="zh-CN" altLang="en-US"/>
           </a:p>
@@ -1133,7 +1138,7 @@
           <a:p>
             <a:fld id="{16F1CE54-7B3F-448E-ACC3-646806B7FDC1}" type="datetimeFigureOut">
               <a:rPr lang="zh-CN" altLang="en-US" smtClean="0"/>
-              <a:t>2025/10/12</a:t>
+              <a:t>2026/2/10</a:t>
             </a:fld>
             <a:endParaRPr lang="zh-CN" altLang="en-US"/>
           </a:p>
@@ -1398,7 +1403,7 @@
           <a:p>
             <a:fld id="{16F1CE54-7B3F-448E-ACC3-646806B7FDC1}" type="datetimeFigureOut">
               <a:rPr lang="zh-CN" altLang="en-US" smtClean="0"/>
-              <a:t>2025/10/12</a:t>
+              <a:t>2026/2/10</a:t>
             </a:fld>
             <a:endParaRPr lang="zh-CN" altLang="en-US"/>
           </a:p>
@@ -1810,7 +1815,7 @@
           <a:p>
             <a:fld id="{16F1CE54-7B3F-448E-ACC3-646806B7FDC1}" type="datetimeFigureOut">
               <a:rPr lang="zh-CN" altLang="en-US" smtClean="0"/>
-              <a:t>2025/10/12</a:t>
+              <a:t>2026/2/10</a:t>
             </a:fld>
             <a:endParaRPr lang="zh-CN" altLang="en-US"/>
           </a:p>
@@ -1951,7 +1956,7 @@
           <a:p>
             <a:fld id="{16F1CE54-7B3F-448E-ACC3-646806B7FDC1}" type="datetimeFigureOut">
               <a:rPr lang="zh-CN" altLang="en-US" smtClean="0"/>
-              <a:t>2025/10/12</a:t>
+              <a:t>2026/2/10</a:t>
             </a:fld>
             <a:endParaRPr lang="zh-CN" altLang="en-US"/>
           </a:p>
@@ -2064,7 +2069,7 @@
           <a:p>
             <a:fld id="{16F1CE54-7B3F-448E-ACC3-646806B7FDC1}" type="datetimeFigureOut">
               <a:rPr lang="zh-CN" altLang="en-US" smtClean="0"/>
-              <a:t>2025/10/12</a:t>
+              <a:t>2026/2/10</a:t>
             </a:fld>
             <a:endParaRPr lang="zh-CN" altLang="en-US"/>
           </a:p>
@@ -2375,7 +2380,7 @@
           <a:p>
             <a:fld id="{16F1CE54-7B3F-448E-ACC3-646806B7FDC1}" type="datetimeFigureOut">
               <a:rPr lang="zh-CN" altLang="en-US" smtClean="0"/>
-              <a:t>2025/10/12</a:t>
+              <a:t>2026/2/10</a:t>
             </a:fld>
             <a:endParaRPr lang="zh-CN" altLang="en-US"/>
           </a:p>
@@ -2663,7 +2668,7 @@
           <a:p>
             <a:fld id="{16F1CE54-7B3F-448E-ACC3-646806B7FDC1}" type="datetimeFigureOut">
               <a:rPr lang="zh-CN" altLang="en-US" smtClean="0"/>
-              <a:t>2025/10/12</a:t>
+              <a:t>2026/2/10</a:t>
             </a:fld>
             <a:endParaRPr lang="zh-CN" altLang="en-US"/>
           </a:p>
@@ -2904,7 +2909,7 @@
           <a:p>
             <a:fld id="{16F1CE54-7B3F-448E-ACC3-646806B7FDC1}" type="datetimeFigureOut">
               <a:rPr lang="zh-CN" altLang="en-US" smtClean="0"/>
-              <a:t>2025/10/12</a:t>
+              <a:t>2026/2/10</a:t>
             </a:fld>
             <a:endParaRPr lang="zh-CN" altLang="en-US"/>
           </a:p>
@@ -3481,94 +3486,6 @@
       </p:cxnSp>
       <p:sp>
         <p:nvSpPr>
-          <p:cNvPr id="13" name="矩形 12">
-            <a:extLst>
-              <a:ext uri="{FF2B5EF4-FFF2-40B4-BE49-F238E27FC236}">
-                <a16:creationId xmlns:a16="http://schemas.microsoft.com/office/drawing/2014/main" id="{62F8E10A-4251-3119-55D3-E77640D81902}"/>
-              </a:ext>
-            </a:extLst>
-          </p:cNvPr>
-          <p:cNvSpPr/>
-          <p:nvPr/>
-        </p:nvSpPr>
-        <p:spPr>
-          <a:xfrm>
-            <a:off x="4154826" y="2340715"/>
-            <a:ext cx="1224894" cy="465690"/>
-          </a:xfrm>
-          <a:prstGeom prst="rect">
-            <a:avLst/>
-          </a:prstGeom>
-        </p:spPr>
-        <p:style>
-          <a:lnRef idx="2">
-            <a:schemeClr val="dk1"/>
-          </a:lnRef>
-          <a:fillRef idx="1">
-            <a:schemeClr val="lt1"/>
-          </a:fillRef>
-          <a:effectRef idx="0">
-            <a:schemeClr val="dk1"/>
-          </a:effectRef>
-          <a:fontRef idx="minor">
-            <a:schemeClr val="dk1"/>
-          </a:fontRef>
-        </p:style>
-        <p:txBody>
-          <a:bodyPr rtlCol="0" anchor="ctr"/>
-          <a:lstStyle/>
-          <a:p>
-            <a:pPr algn="ctr"/>
-            <a:endParaRPr lang="zh-CN" altLang="en-US"/>
-          </a:p>
-        </p:txBody>
-      </p:sp>
-      <p:sp>
-        <p:nvSpPr>
-          <p:cNvPr id="15" name="矩形 14">
-            <a:extLst>
-              <a:ext uri="{FF2B5EF4-FFF2-40B4-BE49-F238E27FC236}">
-                <a16:creationId xmlns:a16="http://schemas.microsoft.com/office/drawing/2014/main" id="{CB4780DC-0B74-9947-9CBF-0C13E8C9CB67}"/>
-              </a:ext>
-            </a:extLst>
-          </p:cNvPr>
-          <p:cNvSpPr/>
-          <p:nvPr/>
-        </p:nvSpPr>
-        <p:spPr>
-          <a:xfrm>
-            <a:off x="5822780" y="2340715"/>
-            <a:ext cx="1224894" cy="465690"/>
-          </a:xfrm>
-          <a:prstGeom prst="rect">
-            <a:avLst/>
-          </a:prstGeom>
-        </p:spPr>
-        <p:style>
-          <a:lnRef idx="2">
-            <a:schemeClr val="dk1"/>
-          </a:lnRef>
-          <a:fillRef idx="1">
-            <a:schemeClr val="lt1"/>
-          </a:fillRef>
-          <a:effectRef idx="0">
-            <a:schemeClr val="dk1"/>
-          </a:effectRef>
-          <a:fontRef idx="minor">
-            <a:schemeClr val="dk1"/>
-          </a:fontRef>
-        </p:style>
-        <p:txBody>
-          <a:bodyPr rtlCol="0" anchor="ctr"/>
-          <a:lstStyle/>
-          <a:p>
-            <a:pPr algn="ctr"/>
-            <a:endParaRPr lang="zh-CN" altLang="en-US"/>
-          </a:p>
-        </p:txBody>
-      </p:sp>
-      <p:sp>
-        <p:nvSpPr>
           <p:cNvPr id="16" name="矩形 15">
             <a:extLst>
               <a:ext uri="{FF2B5EF4-FFF2-40B4-BE49-F238E27FC236}">
@@ -3892,12 +3809,14 @@
               </a:ext>
             </a:extLst>
           </p:cNvPr>
-          <p:cNvCxnSpPr/>
+          <p:cNvCxnSpPr>
+            <a:cxnSpLocks/>
+          </p:cNvCxnSpPr>
           <p:nvPr/>
         </p:nvCxnSpPr>
         <p:spPr>
           <a:xfrm>
-            <a:off x="1958476" y="4224771"/>
+            <a:off x="1752553" y="4017089"/>
             <a:ext cx="0" cy="666750"/>
           </a:xfrm>
           <a:prstGeom prst="line">
@@ -3928,12 +3847,14 @@
               </a:ext>
             </a:extLst>
           </p:cNvPr>
-          <p:cNvCxnSpPr/>
+          <p:cNvCxnSpPr>
+            <a:cxnSpLocks/>
+          </p:cNvCxnSpPr>
           <p:nvPr/>
         </p:nvCxnSpPr>
         <p:spPr>
           <a:xfrm>
-            <a:off x="2303834" y="4224771"/>
+            <a:off x="2107890" y="4012937"/>
             <a:ext cx="0" cy="666750"/>
           </a:xfrm>
           <a:prstGeom prst="line">
@@ -3964,12 +3885,14 @@
               </a:ext>
             </a:extLst>
           </p:cNvPr>
-          <p:cNvCxnSpPr/>
+          <p:cNvCxnSpPr>
+            <a:cxnSpLocks/>
+          </p:cNvCxnSpPr>
           <p:nvPr/>
         </p:nvCxnSpPr>
         <p:spPr>
           <a:xfrm>
-            <a:off x="1799009" y="3939021"/>
+            <a:off x="1593086" y="3731339"/>
             <a:ext cx="159467" cy="285750"/>
           </a:xfrm>
           <a:prstGeom prst="line">
@@ -4007,7 +3930,7 @@
         </p:nvCxnSpPr>
         <p:spPr>
           <a:xfrm>
-            <a:off x="2117943" y="3872346"/>
+            <a:off x="1921999" y="3664662"/>
             <a:ext cx="185891" cy="352425"/>
           </a:xfrm>
           <a:prstGeom prst="line">
@@ -4038,12 +3961,14 @@
               </a:ext>
             </a:extLst>
           </p:cNvPr>
-          <p:cNvCxnSpPr/>
+          <p:cNvCxnSpPr>
+            <a:cxnSpLocks/>
+          </p:cNvCxnSpPr>
           <p:nvPr/>
         </p:nvCxnSpPr>
         <p:spPr>
           <a:xfrm>
-            <a:off x="1551358" y="3872346"/>
+            <a:off x="1345435" y="3664664"/>
             <a:ext cx="247651" cy="66675"/>
           </a:xfrm>
           <a:prstGeom prst="line">
@@ -4074,12 +3999,14 @@
               </a:ext>
             </a:extLst>
           </p:cNvPr>
-          <p:cNvCxnSpPr/>
+          <p:cNvCxnSpPr>
+            <a:cxnSpLocks/>
+          </p:cNvCxnSpPr>
           <p:nvPr/>
         </p:nvCxnSpPr>
         <p:spPr>
           <a:xfrm>
-            <a:off x="1465634" y="3548496"/>
+            <a:off x="1259711" y="3340814"/>
             <a:ext cx="85724" cy="323850"/>
           </a:xfrm>
           <a:prstGeom prst="line">
@@ -4117,7 +4044,7 @@
         </p:nvCxnSpPr>
         <p:spPr>
           <a:xfrm flipH="1">
-            <a:off x="2117943" y="3629199"/>
+            <a:off x="1912020" y="3421517"/>
             <a:ext cx="62063" cy="243147"/>
           </a:xfrm>
           <a:prstGeom prst="line">
@@ -4148,12 +4075,14 @@
               </a:ext>
             </a:extLst>
           </p:cNvPr>
-          <p:cNvCxnSpPr/>
+          <p:cNvCxnSpPr>
+            <a:cxnSpLocks/>
+          </p:cNvCxnSpPr>
           <p:nvPr/>
         </p:nvCxnSpPr>
         <p:spPr>
           <a:xfrm>
-            <a:off x="1878742" y="3434196"/>
+            <a:off x="1672819" y="3226514"/>
             <a:ext cx="301264" cy="195003"/>
           </a:xfrm>
           <a:prstGeom prst="line">
@@ -4189,7 +4118,7 @@
         </p:nvSpPr>
         <p:spPr>
           <a:xfrm>
-            <a:off x="8218170" y="3482340"/>
+            <a:off x="9943334" y="3246480"/>
             <a:ext cx="1657350" cy="1142999"/>
           </a:xfrm>
           <a:prstGeom prst="cube">
@@ -4221,24 +4150,22 @@
       </p:sp>
       <p:cxnSp>
         <p:nvCxnSpPr>
-          <p:cNvPr id="48" name="直接箭头连接符 47">
-            <a:extLst>
-              <a:ext uri="{FF2B5EF4-FFF2-40B4-BE49-F238E27FC236}">
-                <a16:creationId xmlns:a16="http://schemas.microsoft.com/office/drawing/2014/main" id="{5F503D4D-7C6F-5F83-8132-F43FBC1CA0B0}"/>
+          <p:cNvPr id="81" name="直接箭头连接符 80">
+            <a:extLst>
+              <a:ext uri="{FF2B5EF4-FFF2-40B4-BE49-F238E27FC236}">
+                <a16:creationId xmlns:a16="http://schemas.microsoft.com/office/drawing/2014/main" id="{82C9DBDD-E7E4-69DE-1254-EC4BBB907A46}"/>
               </a:ext>
             </a:extLst>
           </p:cNvPr>
           <p:cNvCxnSpPr>
             <a:cxnSpLocks/>
-            <a:stCxn id="17" idx="3"/>
-            <a:endCxn id="13" idx="1"/>
           </p:cNvCxnSpPr>
           <p:nvPr/>
         </p:nvCxnSpPr>
         <p:spPr>
-          <a:xfrm>
-            <a:off x="2474594" y="2572701"/>
-            <a:ext cx="1680232" cy="859"/>
+          <a:xfrm flipH="1">
+            <a:off x="2307050" y="4159996"/>
+            <a:ext cx="1847776" cy="0"/>
           </a:xfrm>
           <a:prstGeom prst="straightConnector1">
             <a:avLst/>
@@ -4246,434 +4173,6 @@
           <a:ln>
             <a:tailEnd type="triangle"/>
           </a:ln>
-        </p:spPr>
-        <p:style>
-          <a:lnRef idx="3">
-            <a:schemeClr val="accent2"/>
-          </a:lnRef>
-          <a:fillRef idx="0">
-            <a:schemeClr val="accent2"/>
-          </a:fillRef>
-          <a:effectRef idx="2">
-            <a:schemeClr val="accent2"/>
-          </a:effectRef>
-          <a:fontRef idx="minor">
-            <a:schemeClr val="tx1"/>
-          </a:fontRef>
-        </p:style>
-      </p:cxnSp>
-      <p:cxnSp>
-        <p:nvCxnSpPr>
-          <p:cNvPr id="51" name="直接箭头连接符 50">
-            <a:extLst>
-              <a:ext uri="{FF2B5EF4-FFF2-40B4-BE49-F238E27FC236}">
-                <a16:creationId xmlns:a16="http://schemas.microsoft.com/office/drawing/2014/main" id="{27D3FC22-8D09-EC83-3C70-20091F62670F}"/>
-              </a:ext>
-            </a:extLst>
-          </p:cNvPr>
-          <p:cNvCxnSpPr/>
-          <p:nvPr/>
-        </p:nvCxnSpPr>
-        <p:spPr>
-          <a:xfrm flipV="1">
-            <a:off x="4417695" y="1811046"/>
-            <a:ext cx="0" cy="528810"/>
-          </a:xfrm>
-          <a:prstGeom prst="straightConnector1">
-            <a:avLst/>
-          </a:prstGeom>
-          <a:ln>
-            <a:tailEnd type="triangle"/>
-          </a:ln>
-        </p:spPr>
-        <p:style>
-          <a:lnRef idx="3">
-            <a:schemeClr val="accent2"/>
-          </a:lnRef>
-          <a:fillRef idx="0">
-            <a:schemeClr val="accent2"/>
-          </a:fillRef>
-          <a:effectRef idx="2">
-            <a:schemeClr val="accent2"/>
-          </a:effectRef>
-          <a:fontRef idx="minor">
-            <a:schemeClr val="tx1"/>
-          </a:fontRef>
-        </p:style>
-      </p:cxnSp>
-      <p:cxnSp>
-        <p:nvCxnSpPr>
-          <p:cNvPr id="53" name="直接箭头连接符 52">
-            <a:extLst>
-              <a:ext uri="{FF2B5EF4-FFF2-40B4-BE49-F238E27FC236}">
-                <a16:creationId xmlns:a16="http://schemas.microsoft.com/office/drawing/2014/main" id="{BD3A55F1-550C-A2D9-F552-606473917AB8}"/>
-              </a:ext>
-            </a:extLst>
-          </p:cNvPr>
-          <p:cNvCxnSpPr>
-            <a:stCxn id="24" idx="1"/>
-            <a:endCxn id="15" idx="3"/>
-          </p:cNvCxnSpPr>
-          <p:nvPr/>
-        </p:nvCxnSpPr>
-        <p:spPr>
-          <a:xfrm flipH="1">
-            <a:off x="7047674" y="2573560"/>
-            <a:ext cx="1513397" cy="0"/>
-          </a:xfrm>
-          <a:prstGeom prst="straightConnector1">
-            <a:avLst/>
-          </a:prstGeom>
-          <a:ln>
-            <a:tailEnd type="triangle"/>
-          </a:ln>
-        </p:spPr>
-        <p:style>
-          <a:lnRef idx="3">
-            <a:schemeClr val="accent5"/>
-          </a:lnRef>
-          <a:fillRef idx="0">
-            <a:schemeClr val="accent5"/>
-          </a:fillRef>
-          <a:effectRef idx="2">
-            <a:schemeClr val="accent5"/>
-          </a:effectRef>
-          <a:fontRef idx="minor">
-            <a:schemeClr val="tx1"/>
-          </a:fontRef>
-        </p:style>
-      </p:cxnSp>
-      <p:cxnSp>
-        <p:nvCxnSpPr>
-          <p:cNvPr id="55" name="直接箭头连接符 54">
-            <a:extLst>
-              <a:ext uri="{FF2B5EF4-FFF2-40B4-BE49-F238E27FC236}">
-                <a16:creationId xmlns:a16="http://schemas.microsoft.com/office/drawing/2014/main" id="{BF7E3F71-AB3E-A368-346F-E9AFDE3938F6}"/>
-              </a:ext>
-            </a:extLst>
-          </p:cNvPr>
-          <p:cNvCxnSpPr/>
-          <p:nvPr/>
-        </p:nvCxnSpPr>
-        <p:spPr>
-          <a:xfrm flipV="1">
-            <a:off x="6798945" y="1811046"/>
-            <a:ext cx="0" cy="528810"/>
-          </a:xfrm>
-          <a:prstGeom prst="straightConnector1">
-            <a:avLst/>
-          </a:prstGeom>
-          <a:ln>
-            <a:tailEnd type="triangle"/>
-          </a:ln>
-        </p:spPr>
-        <p:style>
-          <a:lnRef idx="3">
-            <a:schemeClr val="accent1"/>
-          </a:lnRef>
-          <a:fillRef idx="0">
-            <a:schemeClr val="accent1"/>
-          </a:fillRef>
-          <a:effectRef idx="2">
-            <a:schemeClr val="accent1"/>
-          </a:effectRef>
-          <a:fontRef idx="minor">
-            <a:schemeClr val="tx1"/>
-          </a:fontRef>
-        </p:style>
-      </p:cxnSp>
-      <p:cxnSp>
-        <p:nvCxnSpPr>
-          <p:cNvPr id="57" name="直接箭头连接符 56">
-            <a:extLst>
-              <a:ext uri="{FF2B5EF4-FFF2-40B4-BE49-F238E27FC236}">
-                <a16:creationId xmlns:a16="http://schemas.microsoft.com/office/drawing/2014/main" id="{892176CA-620B-32E3-F98F-990EB1DA8299}"/>
-              </a:ext>
-            </a:extLst>
-          </p:cNvPr>
-          <p:cNvCxnSpPr>
-            <a:stCxn id="13" idx="0"/>
-          </p:cNvCxnSpPr>
-          <p:nvPr/>
-        </p:nvCxnSpPr>
-        <p:spPr>
-          <a:xfrm flipH="1" flipV="1">
-            <a:off x="4760595" y="1811046"/>
-            <a:ext cx="6678" cy="529669"/>
-          </a:xfrm>
-          <a:prstGeom prst="straightConnector1">
-            <a:avLst/>
-          </a:prstGeom>
-          <a:ln>
-            <a:tailEnd type="triangle"/>
-          </a:ln>
-        </p:spPr>
-        <p:style>
-          <a:lnRef idx="3">
-            <a:schemeClr val="dk1"/>
-          </a:lnRef>
-          <a:fillRef idx="0">
-            <a:schemeClr val="dk1"/>
-          </a:fillRef>
-          <a:effectRef idx="2">
-            <a:schemeClr val="dk1"/>
-          </a:effectRef>
-          <a:fontRef idx="minor">
-            <a:schemeClr val="tx1"/>
-          </a:fontRef>
-        </p:style>
-      </p:cxnSp>
-      <p:cxnSp>
-        <p:nvCxnSpPr>
-          <p:cNvPr id="63" name="直接连接符 62">
-            <a:extLst>
-              <a:ext uri="{FF2B5EF4-FFF2-40B4-BE49-F238E27FC236}">
-                <a16:creationId xmlns:a16="http://schemas.microsoft.com/office/drawing/2014/main" id="{F6578593-1065-F634-F527-6C75D82118C0}"/>
-              </a:ext>
-            </a:extLst>
-          </p:cNvPr>
-          <p:cNvCxnSpPr>
-            <a:cxnSpLocks/>
-            <a:endCxn id="13" idx="2"/>
-          </p:cNvCxnSpPr>
-          <p:nvPr/>
-        </p:nvCxnSpPr>
-        <p:spPr>
-          <a:xfrm flipV="1">
-            <a:off x="4767273" y="2806405"/>
-            <a:ext cx="0" cy="352085"/>
-          </a:xfrm>
-          <a:prstGeom prst="line">
-            <a:avLst/>
-          </a:prstGeom>
-        </p:spPr>
-        <p:style>
-          <a:lnRef idx="3">
-            <a:schemeClr val="dk1"/>
-          </a:lnRef>
-          <a:fillRef idx="0">
-            <a:schemeClr val="dk1"/>
-          </a:fillRef>
-          <a:effectRef idx="2">
-            <a:schemeClr val="dk1"/>
-          </a:effectRef>
-          <a:fontRef idx="minor">
-            <a:schemeClr val="tx1"/>
-          </a:fontRef>
-        </p:style>
-      </p:cxnSp>
-      <p:cxnSp>
-        <p:nvCxnSpPr>
-          <p:cNvPr id="73" name="直接连接符 72">
-            <a:extLst>
-              <a:ext uri="{FF2B5EF4-FFF2-40B4-BE49-F238E27FC236}">
-                <a16:creationId xmlns:a16="http://schemas.microsoft.com/office/drawing/2014/main" id="{632A35BF-B548-E8BD-8E01-ABBA83BE2025}"/>
-              </a:ext>
-            </a:extLst>
-          </p:cNvPr>
-          <p:cNvCxnSpPr>
-            <a:cxnSpLocks/>
-          </p:cNvCxnSpPr>
-          <p:nvPr/>
-        </p:nvCxnSpPr>
-        <p:spPr>
-          <a:xfrm>
-            <a:off x="2400300" y="3482340"/>
-            <a:ext cx="1754526" cy="0"/>
-          </a:xfrm>
-          <a:prstGeom prst="line">
-            <a:avLst/>
-          </a:prstGeom>
-        </p:spPr>
-        <p:style>
-          <a:lnRef idx="3">
-            <a:schemeClr val="dk1"/>
-          </a:lnRef>
-          <a:fillRef idx="0">
-            <a:schemeClr val="dk1"/>
-          </a:fillRef>
-          <a:effectRef idx="2">
-            <a:schemeClr val="dk1"/>
-          </a:effectRef>
-          <a:fontRef idx="minor">
-            <a:schemeClr val="tx1"/>
-          </a:fontRef>
-        </p:style>
-      </p:cxnSp>
-      <p:cxnSp>
-        <p:nvCxnSpPr>
-          <p:cNvPr id="76" name="直接连接符 75">
-            <a:extLst>
-              <a:ext uri="{FF2B5EF4-FFF2-40B4-BE49-F238E27FC236}">
-                <a16:creationId xmlns:a16="http://schemas.microsoft.com/office/drawing/2014/main" id="{F10AF4A4-7414-C7BB-1D49-903C50CF1926}"/>
-              </a:ext>
-            </a:extLst>
-          </p:cNvPr>
-          <p:cNvCxnSpPr>
-            <a:cxnSpLocks/>
-          </p:cNvCxnSpPr>
-          <p:nvPr/>
-        </p:nvCxnSpPr>
-        <p:spPr>
-          <a:xfrm>
-            <a:off x="5059680" y="1811046"/>
-            <a:ext cx="0" cy="528810"/>
-          </a:xfrm>
-          <a:prstGeom prst="line">
-            <a:avLst/>
-          </a:prstGeom>
-        </p:spPr>
-        <p:style>
-          <a:lnRef idx="3">
-            <a:schemeClr val="dk1"/>
-          </a:lnRef>
-          <a:fillRef idx="0">
-            <a:schemeClr val="dk1"/>
-          </a:fillRef>
-          <a:effectRef idx="2">
-            <a:schemeClr val="dk1"/>
-          </a:effectRef>
-          <a:fontRef idx="minor">
-            <a:schemeClr val="tx1"/>
-          </a:fontRef>
-        </p:style>
-      </p:cxnSp>
-      <p:cxnSp>
-        <p:nvCxnSpPr>
-          <p:cNvPr id="79" name="直接连接符 78">
-            <a:extLst>
-              <a:ext uri="{FF2B5EF4-FFF2-40B4-BE49-F238E27FC236}">
-                <a16:creationId xmlns:a16="http://schemas.microsoft.com/office/drawing/2014/main" id="{8932A417-6AF2-07AE-B6C6-065166C45132}"/>
-              </a:ext>
-            </a:extLst>
-          </p:cNvPr>
-          <p:cNvCxnSpPr/>
-          <p:nvPr/>
-        </p:nvCxnSpPr>
-        <p:spPr>
-          <a:xfrm>
-            <a:off x="5059680" y="2805546"/>
-            <a:ext cx="0" cy="352944"/>
-          </a:xfrm>
-          <a:prstGeom prst="line">
-            <a:avLst/>
-          </a:prstGeom>
-        </p:spPr>
-        <p:style>
-          <a:lnRef idx="3">
-            <a:schemeClr val="dk1"/>
-          </a:lnRef>
-          <a:fillRef idx="0">
-            <a:schemeClr val="dk1"/>
-          </a:fillRef>
-          <a:effectRef idx="2">
-            <a:schemeClr val="dk1"/>
-          </a:effectRef>
-          <a:fontRef idx="minor">
-            <a:schemeClr val="tx1"/>
-          </a:fontRef>
-        </p:style>
-      </p:cxnSp>
-      <p:cxnSp>
-        <p:nvCxnSpPr>
-          <p:cNvPr id="81" name="直接箭头连接符 80">
-            <a:extLst>
-              <a:ext uri="{FF2B5EF4-FFF2-40B4-BE49-F238E27FC236}">
-                <a16:creationId xmlns:a16="http://schemas.microsoft.com/office/drawing/2014/main" id="{82C9DBDD-E7E4-69DE-1254-EC4BBB907A46}"/>
-              </a:ext>
-            </a:extLst>
-          </p:cNvPr>
-          <p:cNvCxnSpPr>
-            <a:cxnSpLocks/>
-            <a:stCxn id="16" idx="1"/>
-          </p:cNvCxnSpPr>
-          <p:nvPr/>
-        </p:nvCxnSpPr>
-        <p:spPr>
-          <a:xfrm flipH="1">
-            <a:off x="2413981" y="3891915"/>
-            <a:ext cx="1740845" cy="0"/>
-          </a:xfrm>
-          <a:prstGeom prst="straightConnector1">
-            <a:avLst/>
-          </a:prstGeom>
-          <a:ln>
-            <a:tailEnd type="triangle"/>
-          </a:ln>
-        </p:spPr>
-        <p:style>
-          <a:lnRef idx="3">
-            <a:schemeClr val="dk1"/>
-          </a:lnRef>
-          <a:fillRef idx="0">
-            <a:schemeClr val="dk1"/>
-          </a:fillRef>
-          <a:effectRef idx="2">
-            <a:schemeClr val="dk1"/>
-          </a:effectRef>
-          <a:fontRef idx="minor">
-            <a:schemeClr val="tx1"/>
-          </a:fontRef>
-        </p:style>
-      </p:cxnSp>
-      <p:cxnSp>
-        <p:nvCxnSpPr>
-          <p:cNvPr id="84" name="直接连接符 83">
-            <a:extLst>
-              <a:ext uri="{FF2B5EF4-FFF2-40B4-BE49-F238E27FC236}">
-                <a16:creationId xmlns:a16="http://schemas.microsoft.com/office/drawing/2014/main" id="{402F076D-F70A-996B-6F93-590CF7344EEC}"/>
-              </a:ext>
-            </a:extLst>
-          </p:cNvPr>
-          <p:cNvCxnSpPr>
-            <a:cxnSpLocks/>
-          </p:cNvCxnSpPr>
-          <p:nvPr/>
-        </p:nvCxnSpPr>
-        <p:spPr>
-          <a:xfrm>
-            <a:off x="6118860" y="1811046"/>
-            <a:ext cx="0" cy="528810"/>
-          </a:xfrm>
-          <a:prstGeom prst="line">
-            <a:avLst/>
-          </a:prstGeom>
-        </p:spPr>
-        <p:style>
-          <a:lnRef idx="3">
-            <a:schemeClr val="dk1"/>
-          </a:lnRef>
-          <a:fillRef idx="0">
-            <a:schemeClr val="dk1"/>
-          </a:fillRef>
-          <a:effectRef idx="2">
-            <a:schemeClr val="dk1"/>
-          </a:effectRef>
-          <a:fontRef idx="minor">
-            <a:schemeClr val="tx1"/>
-          </a:fontRef>
-        </p:style>
-      </p:cxnSp>
-      <p:cxnSp>
-        <p:nvCxnSpPr>
-          <p:cNvPr id="88" name="直接连接符 87">
-            <a:extLst>
-              <a:ext uri="{FF2B5EF4-FFF2-40B4-BE49-F238E27FC236}">
-                <a16:creationId xmlns:a16="http://schemas.microsoft.com/office/drawing/2014/main" id="{B3DB9688-5131-3C94-50F0-055480BAFF50}"/>
-              </a:ext>
-            </a:extLst>
-          </p:cNvPr>
-          <p:cNvCxnSpPr/>
-          <p:nvPr/>
-        </p:nvCxnSpPr>
-        <p:spPr>
-          <a:xfrm>
-            <a:off x="6118860" y="2805546"/>
-            <a:ext cx="0" cy="352944"/>
-          </a:xfrm>
-          <a:prstGeom prst="line">
-            <a:avLst/>
-          </a:prstGeom>
         </p:spPr>
         <p:style>
           <a:lnRef idx="3">
@@ -4699,13 +4198,15 @@
               </a:ext>
             </a:extLst>
           </p:cNvPr>
-          <p:cNvCxnSpPr/>
+          <p:cNvCxnSpPr>
+            <a:cxnSpLocks/>
+          </p:cNvCxnSpPr>
           <p:nvPr/>
         </p:nvCxnSpPr>
         <p:spPr>
           <a:xfrm>
-            <a:off x="7047674" y="3891396"/>
-            <a:ext cx="1060006" cy="0"/>
+            <a:off x="8722482" y="4159996"/>
+            <a:ext cx="1220852" cy="0"/>
           </a:xfrm>
           <a:prstGeom prst="straightConnector1">
             <a:avLst/>
@@ -4729,124 +4230,6 @@
           </a:fontRef>
         </p:style>
       </p:cxnSp>
-      <p:cxnSp>
-        <p:nvCxnSpPr>
-          <p:cNvPr id="94" name="直接箭头连接符 93">
-            <a:extLst>
-              <a:ext uri="{FF2B5EF4-FFF2-40B4-BE49-F238E27FC236}">
-                <a16:creationId xmlns:a16="http://schemas.microsoft.com/office/drawing/2014/main" id="{DBC12D9C-B8C9-5B0E-0B02-CA879BA7512C}"/>
-              </a:ext>
-            </a:extLst>
-          </p:cNvPr>
-          <p:cNvCxnSpPr>
-            <a:stCxn id="15" idx="0"/>
-          </p:cNvCxnSpPr>
-          <p:nvPr/>
-        </p:nvCxnSpPr>
-        <p:spPr>
-          <a:xfrm flipV="1">
-            <a:off x="6435227" y="1811046"/>
-            <a:ext cx="0" cy="529669"/>
-          </a:xfrm>
-          <a:prstGeom prst="straightConnector1">
-            <a:avLst/>
-          </a:prstGeom>
-          <a:ln>
-            <a:tailEnd type="triangle"/>
-          </a:ln>
-        </p:spPr>
-        <p:style>
-          <a:lnRef idx="3">
-            <a:schemeClr val="dk1"/>
-          </a:lnRef>
-          <a:fillRef idx="0">
-            <a:schemeClr val="dk1"/>
-          </a:fillRef>
-          <a:effectRef idx="2">
-            <a:schemeClr val="dk1"/>
-          </a:effectRef>
-          <a:fontRef idx="minor">
-            <a:schemeClr val="tx1"/>
-          </a:fontRef>
-        </p:style>
-      </p:cxnSp>
-      <p:cxnSp>
-        <p:nvCxnSpPr>
-          <p:cNvPr id="96" name="直接连接符 95">
-            <a:extLst>
-              <a:ext uri="{FF2B5EF4-FFF2-40B4-BE49-F238E27FC236}">
-                <a16:creationId xmlns:a16="http://schemas.microsoft.com/office/drawing/2014/main" id="{26F064D1-96C6-BF12-D333-2D30A75CA86A}"/>
-              </a:ext>
-            </a:extLst>
-          </p:cNvPr>
-          <p:cNvCxnSpPr>
-            <a:endCxn id="15" idx="2"/>
-          </p:cNvCxnSpPr>
-          <p:nvPr/>
-        </p:nvCxnSpPr>
-        <p:spPr>
-          <a:xfrm flipV="1">
-            <a:off x="6435227" y="2806405"/>
-            <a:ext cx="0" cy="352085"/>
-          </a:xfrm>
-          <a:prstGeom prst="line">
-            <a:avLst/>
-          </a:prstGeom>
-        </p:spPr>
-        <p:style>
-          <a:lnRef idx="3">
-            <a:schemeClr val="dk1"/>
-          </a:lnRef>
-          <a:fillRef idx="0">
-            <a:schemeClr val="dk1"/>
-          </a:fillRef>
-          <a:effectRef idx="2">
-            <a:schemeClr val="dk1"/>
-          </a:effectRef>
-          <a:fontRef idx="minor">
-            <a:schemeClr val="tx1"/>
-          </a:fontRef>
-        </p:style>
-      </p:cxnSp>
-      <p:cxnSp>
-        <p:nvCxnSpPr>
-          <p:cNvPr id="98" name="直接连接符 97">
-            <a:extLst>
-              <a:ext uri="{FF2B5EF4-FFF2-40B4-BE49-F238E27FC236}">
-                <a16:creationId xmlns:a16="http://schemas.microsoft.com/office/drawing/2014/main" id="{97E3F509-91D0-8B3B-2F97-757E731166FA}"/>
-              </a:ext>
-            </a:extLst>
-          </p:cNvPr>
-          <p:cNvCxnSpPr>
-            <a:cxnSpLocks/>
-          </p:cNvCxnSpPr>
-          <p:nvPr/>
-        </p:nvCxnSpPr>
-        <p:spPr>
-          <a:xfrm>
-            <a:off x="7047674" y="3434196"/>
-            <a:ext cx="1060006" cy="0"/>
-          </a:xfrm>
-          <a:prstGeom prst="line">
-            <a:avLst/>
-          </a:prstGeom>
-          <a:ln/>
-        </p:spPr>
-        <p:style>
-          <a:lnRef idx="3">
-            <a:schemeClr val="dk1"/>
-          </a:lnRef>
-          <a:fillRef idx="0">
-            <a:schemeClr val="dk1"/>
-          </a:fillRef>
-          <a:effectRef idx="2">
-            <a:schemeClr val="dk1"/>
-          </a:effectRef>
-          <a:fontRef idx="minor">
-            <a:schemeClr val="tx1"/>
-          </a:fontRef>
-        </p:style>
-      </p:cxnSp>
       <p:sp>
         <p:nvSpPr>
           <p:cNvPr id="101" name="文本框 100">
@@ -4885,10 +4268,10 @@
       </p:sp>
       <p:sp>
         <p:nvSpPr>
-          <p:cNvPr id="102" name="文本框 101">
-            <a:extLst>
-              <a:ext uri="{FF2B5EF4-FFF2-40B4-BE49-F238E27FC236}">
-                <a16:creationId xmlns:a16="http://schemas.microsoft.com/office/drawing/2014/main" id="{552EA3F8-80E4-8A4D-9620-475895AB244E}"/>
+          <p:cNvPr id="109" name="文本框 108">
+            <a:extLst>
+              <a:ext uri="{FF2B5EF4-FFF2-40B4-BE49-F238E27FC236}">
+                <a16:creationId xmlns:a16="http://schemas.microsoft.com/office/drawing/2014/main" id="{7EE39F46-FBB2-8F36-021B-D562A1ACB675}"/>
               </a:ext>
             </a:extLst>
           </p:cNvPr>
@@ -4897,8 +4280,8 @@
         </p:nvSpPr>
         <p:spPr>
           <a:xfrm>
-            <a:off x="4345325" y="2425693"/>
-            <a:ext cx="1224894" cy="307777"/>
+            <a:off x="1554608" y="2075880"/>
+            <a:ext cx="1208819" cy="230832"/>
           </a:xfrm>
           <a:prstGeom prst="rect">
             <a:avLst/>
@@ -4912,82 +4295,18 @@
           <a:lstStyle/>
           <a:p>
             <a:r>
-              <a:rPr lang="en-US" altLang="zh-CN" sz="1400" dirty="0"/>
-              <a:t>ESP</a:t>
-            </a:r>
-            <a:r>
-              <a:rPr lang="zh-CN" altLang="en-US" sz="1400" dirty="0"/>
-              <a:t>底板</a:t>
-            </a:r>
-          </a:p>
-        </p:txBody>
-      </p:sp>
-      <p:pic>
-        <p:nvPicPr>
-          <p:cNvPr id="107" name="图片 106">
-            <a:extLst>
-              <a:ext uri="{FF2B5EF4-FFF2-40B4-BE49-F238E27FC236}">
-                <a16:creationId xmlns:a16="http://schemas.microsoft.com/office/drawing/2014/main" id="{C581D1BE-7929-DFD0-E9E4-565684C96FF5}"/>
-              </a:ext>
-            </a:extLst>
-          </p:cNvPr>
-          <p:cNvPicPr>
-            <a:picLocks noChangeAspect="1"/>
-          </p:cNvPicPr>
-          <p:nvPr/>
-        </p:nvPicPr>
-        <p:blipFill>
-          <a:blip r:embed="rId2"/>
-          <a:stretch>
-            <a:fillRect/>
-          </a:stretch>
-        </p:blipFill>
-        <p:spPr>
-          <a:xfrm rot="19556420">
-            <a:off x="3915066" y="1931527"/>
-            <a:ext cx="421445" cy="351205"/>
-          </a:xfrm>
-          <a:prstGeom prst="rect">
-            <a:avLst/>
-          </a:prstGeom>
-        </p:spPr>
-      </p:pic>
-      <p:pic>
-        <p:nvPicPr>
-          <p:cNvPr id="108" name="图片 107">
-            <a:extLst>
-              <a:ext uri="{FF2B5EF4-FFF2-40B4-BE49-F238E27FC236}">
-                <a16:creationId xmlns:a16="http://schemas.microsoft.com/office/drawing/2014/main" id="{57B5C49A-BC30-AA12-2B42-E335D45D869F}"/>
-              </a:ext>
-            </a:extLst>
-          </p:cNvPr>
-          <p:cNvPicPr>
-            <a:picLocks noChangeAspect="1"/>
-          </p:cNvPicPr>
-          <p:nvPr/>
-        </p:nvPicPr>
-        <p:blipFill>
-          <a:blip r:embed="rId2"/>
-          <a:stretch>
-            <a:fillRect/>
-          </a:stretch>
-        </p:blipFill>
-        <p:spPr>
-          <a:xfrm rot="2467998">
-            <a:off x="6889017" y="1954934"/>
-            <a:ext cx="421445" cy="351205"/>
-          </a:xfrm>
-          <a:prstGeom prst="rect">
-            <a:avLst/>
-          </a:prstGeom>
-        </p:spPr>
-      </p:pic>
-      <p:sp>
-        <p:nvSpPr>
-          <p:cNvPr id="109" name="文本框 108">
-            <a:extLst>
-              <a:ext uri="{FF2B5EF4-FFF2-40B4-BE49-F238E27FC236}">
-                <a16:creationId xmlns:a16="http://schemas.microsoft.com/office/drawing/2014/main" id="{7EE39F46-FBB2-8F36-021B-D562A1ACB675}"/>
+              <a:rPr lang="zh-CN" altLang="en-US" sz="900" dirty="0"/>
+              <a:t>机械臂摄像头</a:t>
+            </a:r>
+          </a:p>
+        </p:txBody>
+      </p:sp>
+      <p:sp>
+        <p:nvSpPr>
+          <p:cNvPr id="110" name="文本框 109">
+            <a:extLst>
+              <a:ext uri="{FF2B5EF4-FFF2-40B4-BE49-F238E27FC236}">
+                <a16:creationId xmlns:a16="http://schemas.microsoft.com/office/drawing/2014/main" id="{AEBE8472-1F27-65C6-4DE9-6908E66B8913}"/>
               </a:ext>
             </a:extLst>
           </p:cNvPr>
@@ -4996,8 +4315,8 @@
         </p:nvSpPr>
         <p:spPr>
           <a:xfrm>
-            <a:off x="1554608" y="2075880"/>
-            <a:ext cx="1208819" cy="230832"/>
+            <a:off x="8662308" y="2075880"/>
+            <a:ext cx="1473921" cy="230832"/>
           </a:xfrm>
           <a:prstGeom prst="rect">
             <a:avLst/>
@@ -5012,17 +4331,17 @@
           <a:p>
             <a:r>
               <a:rPr lang="zh-CN" altLang="en-US" sz="900" dirty="0"/>
-              <a:t>机械臂摄像头</a:t>
-            </a:r>
-          </a:p>
-        </p:txBody>
-      </p:sp>
-      <p:sp>
-        <p:nvSpPr>
-          <p:cNvPr id="110" name="文本框 109">
-            <a:extLst>
-              <a:ext uri="{FF2B5EF4-FFF2-40B4-BE49-F238E27FC236}">
-                <a16:creationId xmlns:a16="http://schemas.microsoft.com/office/drawing/2014/main" id="{AEBE8472-1F27-65C6-4DE9-6908E66B8913}"/>
+              <a:t>鱼缸摄像头</a:t>
+            </a:r>
+          </a:p>
+        </p:txBody>
+      </p:sp>
+      <p:sp>
+        <p:nvSpPr>
+          <p:cNvPr id="113" name="文本框 112">
+            <a:extLst>
+              <a:ext uri="{FF2B5EF4-FFF2-40B4-BE49-F238E27FC236}">
+                <a16:creationId xmlns:a16="http://schemas.microsoft.com/office/drawing/2014/main" id="{93FEAC93-6A35-2160-2530-BF0497128901}"/>
               </a:ext>
             </a:extLst>
           </p:cNvPr>
@@ -5031,8 +4350,8 @@
         </p:nvSpPr>
         <p:spPr>
           <a:xfrm>
-            <a:off x="8662308" y="2075880"/>
-            <a:ext cx="1473921" cy="230832"/>
+            <a:off x="2695823" y="3424891"/>
+            <a:ext cx="1455207" cy="230832"/>
           </a:xfrm>
           <a:prstGeom prst="rect">
             <a:avLst/>
@@ -5047,17 +4366,17 @@
           <a:p>
             <a:r>
               <a:rPr lang="zh-CN" altLang="en-US" sz="900" dirty="0"/>
-              <a:t>鱼缸摄像头</a:t>
-            </a:r>
-          </a:p>
-        </p:txBody>
-      </p:sp>
-      <p:sp>
-        <p:nvSpPr>
-          <p:cNvPr id="111" name="文本框 110">
-            <a:extLst>
-              <a:ext uri="{FF2B5EF4-FFF2-40B4-BE49-F238E27FC236}">
-                <a16:creationId xmlns:a16="http://schemas.microsoft.com/office/drawing/2014/main" id="{93FA1B18-D84D-B860-18DC-6C5C9C06ACBB}"/>
+              <a:t>坐标等数据</a:t>
+            </a:r>
+          </a:p>
+        </p:txBody>
+      </p:sp>
+      <p:sp>
+        <p:nvSpPr>
+          <p:cNvPr id="114" name="文本框 113">
+            <a:extLst>
+              <a:ext uri="{FF2B5EF4-FFF2-40B4-BE49-F238E27FC236}">
+                <a16:creationId xmlns:a16="http://schemas.microsoft.com/office/drawing/2014/main" id="{B68ACB94-280B-EE78-2BF8-6A72F10350D4}"/>
               </a:ext>
             </a:extLst>
           </p:cNvPr>
@@ -5066,8 +4385,8 @@
         </p:nvSpPr>
         <p:spPr>
           <a:xfrm>
-            <a:off x="2759028" y="2371566"/>
-            <a:ext cx="966526" cy="230832"/>
+            <a:off x="2761188" y="4186414"/>
+            <a:ext cx="1149405" cy="230832"/>
           </a:xfrm>
           <a:prstGeom prst="rect">
             <a:avLst/>
@@ -5081,24 +4400,18 @@
           <a:lstStyle/>
           <a:p>
             <a:r>
-              <a:rPr lang="zh-CN" altLang="en-US" sz="900" dirty="0">
-                <a:solidFill>
-                  <a:schemeClr val="accent2">
-                    <a:lumMod val="75000"/>
-                  </a:schemeClr>
-                </a:solidFill>
-              </a:rPr>
-              <a:t>摄像头数据</a:t>
-            </a:r>
-          </a:p>
-        </p:txBody>
-      </p:sp>
-      <p:sp>
-        <p:nvSpPr>
-          <p:cNvPr id="112" name="文本框 111">
-            <a:extLst>
-              <a:ext uri="{FF2B5EF4-FFF2-40B4-BE49-F238E27FC236}">
-                <a16:creationId xmlns:a16="http://schemas.microsoft.com/office/drawing/2014/main" id="{81634E6E-7C50-929E-DECC-154B74CDEE91}"/>
+              <a:rPr lang="zh-CN" altLang="en-US" sz="900" dirty="0"/>
+              <a:t>控制信号</a:t>
+            </a:r>
+          </a:p>
+        </p:txBody>
+      </p:sp>
+      <p:sp>
+        <p:nvSpPr>
+          <p:cNvPr id="115" name="文本框 114">
+            <a:extLst>
+              <a:ext uri="{FF2B5EF4-FFF2-40B4-BE49-F238E27FC236}">
+                <a16:creationId xmlns:a16="http://schemas.microsoft.com/office/drawing/2014/main" id="{3EE7D742-8FEF-2E60-56DE-66BD9F621DC1}"/>
               </a:ext>
             </a:extLst>
           </p:cNvPr>
@@ -5107,8 +4420,8 @@
         </p:nvSpPr>
         <p:spPr>
           <a:xfrm>
-            <a:off x="7354604" y="2366576"/>
-            <a:ext cx="930885" cy="230832"/>
+            <a:off x="8781883" y="3349256"/>
+            <a:ext cx="1224894" cy="230832"/>
           </a:xfrm>
           <a:prstGeom prst="rect">
             <a:avLst/>
@@ -5122,24 +4435,18 @@
           <a:lstStyle/>
           <a:p>
             <a:r>
-              <a:rPr lang="zh-CN" altLang="en-US" sz="900" dirty="0">
-                <a:solidFill>
-                  <a:schemeClr val="accent1">
-                    <a:lumMod val="75000"/>
-                  </a:schemeClr>
-                </a:solidFill>
-              </a:rPr>
-              <a:t>摄像头数据</a:t>
-            </a:r>
-          </a:p>
-        </p:txBody>
-      </p:sp>
-      <p:sp>
-        <p:nvSpPr>
-          <p:cNvPr id="113" name="文本框 112">
-            <a:extLst>
-              <a:ext uri="{FF2B5EF4-FFF2-40B4-BE49-F238E27FC236}">
-                <a16:creationId xmlns:a16="http://schemas.microsoft.com/office/drawing/2014/main" id="{93FEAC93-6A35-2160-2530-BF0497128901}"/>
+              <a:rPr lang="zh-CN" altLang="en-US" sz="900" dirty="0"/>
+              <a:t>传感器数据</a:t>
+            </a:r>
+          </a:p>
+        </p:txBody>
+      </p:sp>
+      <p:sp>
+        <p:nvSpPr>
+          <p:cNvPr id="116" name="文本框 115">
+            <a:extLst>
+              <a:ext uri="{FF2B5EF4-FFF2-40B4-BE49-F238E27FC236}">
+                <a16:creationId xmlns:a16="http://schemas.microsoft.com/office/drawing/2014/main" id="{A923A419-70E3-1695-F8D1-643E84E8AE04}"/>
               </a:ext>
             </a:extLst>
           </p:cNvPr>
@@ -5148,8 +4455,8 @@
         </p:nvSpPr>
         <p:spPr>
           <a:xfrm>
-            <a:off x="2810109" y="3267977"/>
-            <a:ext cx="1455207" cy="230832"/>
+            <a:off x="8865870" y="4186414"/>
+            <a:ext cx="942220" cy="230832"/>
           </a:xfrm>
           <a:prstGeom prst="rect">
             <a:avLst/>
@@ -5164,17 +4471,17 @@
           <a:p>
             <a:r>
               <a:rPr lang="zh-CN" altLang="en-US" sz="900" dirty="0"/>
-              <a:t>坐标等数据</a:t>
-            </a:r>
-          </a:p>
-        </p:txBody>
-      </p:sp>
-      <p:sp>
-        <p:nvSpPr>
-          <p:cNvPr id="114" name="文本框 113">
-            <a:extLst>
-              <a:ext uri="{FF2B5EF4-FFF2-40B4-BE49-F238E27FC236}">
-                <a16:creationId xmlns:a16="http://schemas.microsoft.com/office/drawing/2014/main" id="{B68ACB94-280B-EE78-2BF8-6A72F10350D4}"/>
+              <a:t>控制信号</a:t>
+            </a:r>
+          </a:p>
+        </p:txBody>
+      </p:sp>
+      <p:sp>
+        <p:nvSpPr>
+          <p:cNvPr id="117" name="文本框 116">
+            <a:extLst>
+              <a:ext uri="{FF2B5EF4-FFF2-40B4-BE49-F238E27FC236}">
+                <a16:creationId xmlns:a16="http://schemas.microsoft.com/office/drawing/2014/main" id="{37A898F9-2B8D-62CD-1847-A9A2C8D2BBC5}"/>
               </a:ext>
             </a:extLst>
           </p:cNvPr>
@@ -5183,8 +4490,8 @@
         </p:nvSpPr>
         <p:spPr>
           <a:xfrm>
-            <a:off x="2864077" y="3657100"/>
-            <a:ext cx="1149405" cy="230832"/>
+            <a:off x="1643462" y="4734605"/>
+            <a:ext cx="1920235" cy="230832"/>
           </a:xfrm>
           <a:prstGeom prst="rect">
             <a:avLst/>
@@ -5199,17 +4506,17 @@
           <a:p>
             <a:r>
               <a:rPr lang="zh-CN" altLang="en-US" sz="900" dirty="0"/>
-              <a:t>控制信号</a:t>
-            </a:r>
-          </a:p>
-        </p:txBody>
-      </p:sp>
-      <p:sp>
-        <p:nvSpPr>
-          <p:cNvPr id="115" name="文本框 114">
-            <a:extLst>
-              <a:ext uri="{FF2B5EF4-FFF2-40B4-BE49-F238E27FC236}">
-                <a16:creationId xmlns:a16="http://schemas.microsoft.com/office/drawing/2014/main" id="{3EE7D742-8FEF-2E60-56DE-66BD9F621DC1}"/>
+              <a:t>机械臂</a:t>
+            </a:r>
+          </a:p>
+        </p:txBody>
+      </p:sp>
+      <p:sp>
+        <p:nvSpPr>
+          <p:cNvPr id="118" name="文本框 117">
+            <a:extLst>
+              <a:ext uri="{FF2B5EF4-FFF2-40B4-BE49-F238E27FC236}">
+                <a16:creationId xmlns:a16="http://schemas.microsoft.com/office/drawing/2014/main" id="{762D53E7-E875-D856-E2E4-38BA8A5AAFE7}"/>
               </a:ext>
             </a:extLst>
           </p:cNvPr>
@@ -5218,8 +4525,8 @@
         </p:nvSpPr>
         <p:spPr>
           <a:xfrm>
-            <a:off x="7138998" y="3227661"/>
-            <a:ext cx="1224894" cy="230832"/>
+            <a:off x="10307253" y="4483909"/>
+            <a:ext cx="1193745" cy="230832"/>
           </a:xfrm>
           <a:prstGeom prst="rect">
             <a:avLst/>
@@ -5234,111 +4541,6 @@
           <a:p>
             <a:r>
               <a:rPr lang="zh-CN" altLang="en-US" sz="900" dirty="0"/>
-              <a:t>传感器数据</a:t>
-            </a:r>
-          </a:p>
-        </p:txBody>
-      </p:sp>
-      <p:sp>
-        <p:nvSpPr>
-          <p:cNvPr id="116" name="文本框 115">
-            <a:extLst>
-              <a:ext uri="{FF2B5EF4-FFF2-40B4-BE49-F238E27FC236}">
-                <a16:creationId xmlns:a16="http://schemas.microsoft.com/office/drawing/2014/main" id="{A923A419-70E3-1695-F8D1-643E84E8AE04}"/>
-              </a:ext>
-            </a:extLst>
-          </p:cNvPr>
-          <p:cNvSpPr txBox="1"/>
-          <p:nvPr/>
-        </p:nvSpPr>
-        <p:spPr>
-          <a:xfrm>
-            <a:off x="7220705" y="3680652"/>
-            <a:ext cx="942220" cy="230832"/>
-          </a:xfrm>
-          <a:prstGeom prst="rect">
-            <a:avLst/>
-          </a:prstGeom>
-          <a:noFill/>
-        </p:spPr>
-        <p:txBody>
-          <a:bodyPr wrap="square" rtlCol="0">
-            <a:spAutoFit/>
-          </a:bodyPr>
-          <a:lstStyle/>
-          <a:p>
-            <a:r>
-              <a:rPr lang="zh-CN" altLang="en-US" sz="900" dirty="0"/>
-              <a:t>控制信号</a:t>
-            </a:r>
-          </a:p>
-        </p:txBody>
-      </p:sp>
-      <p:sp>
-        <p:nvSpPr>
-          <p:cNvPr id="117" name="文本框 116">
-            <a:extLst>
-              <a:ext uri="{FF2B5EF4-FFF2-40B4-BE49-F238E27FC236}">
-                <a16:creationId xmlns:a16="http://schemas.microsoft.com/office/drawing/2014/main" id="{37A898F9-2B8D-62CD-1847-A9A2C8D2BBC5}"/>
-              </a:ext>
-            </a:extLst>
-          </p:cNvPr>
-          <p:cNvSpPr txBox="1"/>
-          <p:nvPr/>
-        </p:nvSpPr>
-        <p:spPr>
-          <a:xfrm>
-            <a:off x="1893016" y="4918034"/>
-            <a:ext cx="1920235" cy="230832"/>
-          </a:xfrm>
-          <a:prstGeom prst="rect">
-            <a:avLst/>
-          </a:prstGeom>
-          <a:noFill/>
-        </p:spPr>
-        <p:txBody>
-          <a:bodyPr wrap="square" rtlCol="0">
-            <a:spAutoFit/>
-          </a:bodyPr>
-          <a:lstStyle/>
-          <a:p>
-            <a:r>
-              <a:rPr lang="zh-CN" altLang="en-US" sz="900" dirty="0"/>
-              <a:t>机械臂</a:t>
-            </a:r>
-          </a:p>
-        </p:txBody>
-      </p:sp>
-      <p:sp>
-        <p:nvSpPr>
-          <p:cNvPr id="118" name="文本框 117">
-            <a:extLst>
-              <a:ext uri="{FF2B5EF4-FFF2-40B4-BE49-F238E27FC236}">
-                <a16:creationId xmlns:a16="http://schemas.microsoft.com/office/drawing/2014/main" id="{762D53E7-E875-D856-E2E4-38BA8A5AAFE7}"/>
-              </a:ext>
-            </a:extLst>
-          </p:cNvPr>
-          <p:cNvSpPr txBox="1"/>
-          <p:nvPr/>
-        </p:nvSpPr>
-        <p:spPr>
-          <a:xfrm>
-            <a:off x="8500109" y="4776105"/>
-            <a:ext cx="1193745" cy="230832"/>
-          </a:xfrm>
-          <a:prstGeom prst="rect">
-            <a:avLst/>
-          </a:prstGeom>
-          <a:noFill/>
-        </p:spPr>
-        <p:txBody>
-          <a:bodyPr wrap="square" rtlCol="0">
-            <a:spAutoFit/>
-          </a:bodyPr>
-          <a:lstStyle/>
-          <a:p>
-            <a:r>
-              <a:rPr lang="zh-CN" altLang="en-US" sz="900" dirty="0"/>
               <a:t>鱼缸和传感器</a:t>
             </a:r>
           </a:p>
@@ -5346,78 +4548,6 @@
       </p:sp>
       <p:sp>
         <p:nvSpPr>
-          <p:cNvPr id="119" name="文本框 118">
-            <a:extLst>
-              <a:ext uri="{FF2B5EF4-FFF2-40B4-BE49-F238E27FC236}">
-                <a16:creationId xmlns:a16="http://schemas.microsoft.com/office/drawing/2014/main" id="{4F1C8DBA-171D-7C55-194B-5C539BAC30CA}"/>
-              </a:ext>
-            </a:extLst>
-          </p:cNvPr>
-          <p:cNvSpPr txBox="1"/>
-          <p:nvPr/>
-        </p:nvSpPr>
-        <p:spPr>
-          <a:xfrm>
-            <a:off x="4417695" y="2855582"/>
-            <a:ext cx="969995" cy="230832"/>
-          </a:xfrm>
-          <a:prstGeom prst="rect">
-            <a:avLst/>
-          </a:prstGeom>
-          <a:noFill/>
-        </p:spPr>
-        <p:txBody>
-          <a:bodyPr wrap="square" rtlCol="0">
-            <a:spAutoFit/>
-          </a:bodyPr>
-          <a:lstStyle/>
-          <a:p>
-            <a:r>
-              <a:rPr lang="en-US" altLang="zh-CN" sz="900" dirty="0"/>
-              <a:t>I2C</a:t>
-            </a:r>
-            <a:endParaRPr lang="zh-CN" altLang="en-US" sz="900" dirty="0"/>
-          </a:p>
-        </p:txBody>
-      </p:sp>
-      <p:sp>
-        <p:nvSpPr>
-          <p:cNvPr id="120" name="文本框 119">
-            <a:extLst>
-              <a:ext uri="{FF2B5EF4-FFF2-40B4-BE49-F238E27FC236}">
-                <a16:creationId xmlns:a16="http://schemas.microsoft.com/office/drawing/2014/main" id="{AD40A7EF-10F2-14A7-872B-2438EAFCA8E9}"/>
-              </a:ext>
-            </a:extLst>
-          </p:cNvPr>
-          <p:cNvSpPr txBox="1"/>
-          <p:nvPr/>
-        </p:nvSpPr>
-        <p:spPr>
-          <a:xfrm>
-            <a:off x="6457122" y="2855582"/>
-            <a:ext cx="969995" cy="230832"/>
-          </a:xfrm>
-          <a:prstGeom prst="rect">
-            <a:avLst/>
-          </a:prstGeom>
-          <a:noFill/>
-        </p:spPr>
-        <p:txBody>
-          <a:bodyPr wrap="square" rtlCol="0">
-            <a:spAutoFit/>
-          </a:bodyPr>
-          <a:lstStyle/>
-          <a:p>
-            <a:r>
-              <a:rPr lang="en-US" altLang="zh-CN" sz="900" dirty="0"/>
-              <a:t>I2C</a:t>
-            </a:r>
-            <a:endParaRPr lang="zh-CN" altLang="en-US" sz="900" dirty="0"/>
-          </a:p>
-        </p:txBody>
-      </p:sp>
-      <p:sp>
-        <p:nvSpPr>
           <p:cNvPr id="121" name="矩形 120">
             <a:extLst>
               <a:ext uri="{FF2B5EF4-FFF2-40B4-BE49-F238E27FC236}">
@@ -5430,7 +4560,7 @@
         </p:nvSpPr>
         <p:spPr>
           <a:xfrm>
-            <a:off x="5066240" y="3458493"/>
+            <a:off x="7652463" y="3385456"/>
             <a:ext cx="1070019" cy="944765"/>
           </a:xfrm>
           <a:prstGeom prst="rect">
@@ -5459,49 +4589,17 @@
           <a:p>
             <a:pPr algn="ctr"/>
             <a:r>
+              <a:rPr lang="en-US" altLang="zh-CN" sz="1050" dirty="0"/>
+              <a:t>Renesas</a:t>
+            </a:r>
+          </a:p>
+          <a:p>
+            <a:pPr algn="ctr"/>
+            <a:r>
               <a:rPr lang="en-US" altLang="zh-CN" dirty="0"/>
-              <a:t>Renesas</a:t>
+              <a:t>RA6E2</a:t>
             </a:r>
             <a:endParaRPr lang="zh-CN" altLang="en-US" dirty="0"/>
-          </a:p>
-        </p:txBody>
-      </p:sp>
-      <p:sp>
-        <p:nvSpPr>
-          <p:cNvPr id="122" name="文本框 121">
-            <a:extLst>
-              <a:ext uri="{FF2B5EF4-FFF2-40B4-BE49-F238E27FC236}">
-                <a16:creationId xmlns:a16="http://schemas.microsoft.com/office/drawing/2014/main" id="{3F56319F-257C-16EE-5336-0E5638E9AC4E}"/>
-              </a:ext>
-            </a:extLst>
-          </p:cNvPr>
-          <p:cNvSpPr txBox="1"/>
-          <p:nvPr/>
-        </p:nvSpPr>
-        <p:spPr>
-          <a:xfrm>
-            <a:off x="6013279" y="2411130"/>
-            <a:ext cx="1224894" cy="307777"/>
-          </a:xfrm>
-          <a:prstGeom prst="rect">
-            <a:avLst/>
-          </a:prstGeom>
-          <a:noFill/>
-        </p:spPr>
-        <p:txBody>
-          <a:bodyPr wrap="square" rtlCol="0">
-            <a:spAutoFit/>
-          </a:bodyPr>
-          <a:lstStyle/>
-          <a:p>
-            <a:r>
-              <a:rPr lang="en-US" altLang="zh-CN" sz="1400" dirty="0"/>
-              <a:t>ESP</a:t>
-            </a:r>
-            <a:r>
-              <a:rPr lang="zh-CN" altLang="en-US" sz="1400" dirty="0"/>
-              <a:t>底板</a:t>
-            </a:r>
           </a:p>
         </p:txBody>
       </p:sp>
@@ -6107,6 +5205,977 @@
           </a:fillRef>
           <a:effectRef idx="2">
             <a:schemeClr val="dk1"/>
+          </a:effectRef>
+          <a:fontRef idx="minor">
+            <a:schemeClr val="tx1"/>
+          </a:fontRef>
+        </p:style>
+      </p:cxnSp>
+      <p:cxnSp>
+        <p:nvCxnSpPr>
+          <p:cNvPr id="3" name="直接箭头连接符 2">
+            <a:extLst>
+              <a:ext uri="{FF2B5EF4-FFF2-40B4-BE49-F238E27FC236}">
+                <a16:creationId xmlns:a16="http://schemas.microsoft.com/office/drawing/2014/main" id="{162C8B33-5571-5121-CD51-DAEA79DDEF06}"/>
+              </a:ext>
+            </a:extLst>
+          </p:cNvPr>
+          <p:cNvCxnSpPr>
+            <a:cxnSpLocks/>
+          </p:cNvCxnSpPr>
+          <p:nvPr/>
+        </p:nvCxnSpPr>
+        <p:spPr>
+          <a:xfrm flipV="1">
+            <a:off x="5601249" y="1811046"/>
+            <a:ext cx="0" cy="1347444"/>
+          </a:xfrm>
+          <a:prstGeom prst="straightConnector1">
+            <a:avLst/>
+          </a:prstGeom>
+          <a:ln>
+            <a:tailEnd type="triangle"/>
+          </a:ln>
+        </p:spPr>
+        <p:style>
+          <a:lnRef idx="3">
+            <a:schemeClr val="accent1"/>
+          </a:lnRef>
+          <a:fillRef idx="0">
+            <a:schemeClr val="accent1"/>
+          </a:fillRef>
+          <a:effectRef idx="2">
+            <a:schemeClr val="accent1"/>
+          </a:effectRef>
+          <a:fontRef idx="minor">
+            <a:schemeClr val="tx1"/>
+          </a:fontRef>
+        </p:style>
+      </p:cxnSp>
+      <p:cxnSp>
+        <p:nvCxnSpPr>
+          <p:cNvPr id="11" name="直接连接符 10">
+            <a:extLst>
+              <a:ext uri="{FF2B5EF4-FFF2-40B4-BE49-F238E27FC236}">
+                <a16:creationId xmlns:a16="http://schemas.microsoft.com/office/drawing/2014/main" id="{07077574-1C70-F29F-409F-199680520487}"/>
+              </a:ext>
+            </a:extLst>
+          </p:cNvPr>
+          <p:cNvCxnSpPr>
+            <a:cxnSpLocks/>
+          </p:cNvCxnSpPr>
+          <p:nvPr/>
+        </p:nvCxnSpPr>
+        <p:spPr>
+          <a:xfrm flipV="1">
+            <a:off x="1551358" y="1033335"/>
+            <a:ext cx="0" cy="1306521"/>
+          </a:xfrm>
+          <a:prstGeom prst="line">
+            <a:avLst/>
+          </a:prstGeom>
+        </p:spPr>
+        <p:style>
+          <a:lnRef idx="3">
+            <a:schemeClr val="accent1"/>
+          </a:lnRef>
+          <a:fillRef idx="0">
+            <a:schemeClr val="accent1"/>
+          </a:fillRef>
+          <a:effectRef idx="2">
+            <a:schemeClr val="accent1"/>
+          </a:effectRef>
+          <a:fontRef idx="minor">
+            <a:schemeClr val="tx1"/>
+          </a:fontRef>
+        </p:style>
+      </p:cxnSp>
+      <p:cxnSp>
+        <p:nvCxnSpPr>
+          <p:cNvPr id="21" name="直接箭头连接符 20">
+            <a:extLst>
+              <a:ext uri="{FF2B5EF4-FFF2-40B4-BE49-F238E27FC236}">
+                <a16:creationId xmlns:a16="http://schemas.microsoft.com/office/drawing/2014/main" id="{892FF4C3-B882-12EF-3BC3-67DECE32F366}"/>
+              </a:ext>
+            </a:extLst>
+          </p:cNvPr>
+          <p:cNvCxnSpPr>
+            <a:cxnSpLocks/>
+            <a:endCxn id="4" idx="1"/>
+          </p:cNvCxnSpPr>
+          <p:nvPr/>
+        </p:nvCxnSpPr>
+        <p:spPr>
+          <a:xfrm>
+            <a:off x="1551358" y="1033335"/>
+            <a:ext cx="3281607" cy="1"/>
+          </a:xfrm>
+          <a:prstGeom prst="straightConnector1">
+            <a:avLst/>
+          </a:prstGeom>
+          <a:ln>
+            <a:tailEnd type="triangle"/>
+          </a:ln>
+        </p:spPr>
+        <p:style>
+          <a:lnRef idx="3">
+            <a:schemeClr val="accent1"/>
+          </a:lnRef>
+          <a:fillRef idx="0">
+            <a:schemeClr val="accent1"/>
+          </a:fillRef>
+          <a:effectRef idx="2">
+            <a:schemeClr val="accent1"/>
+          </a:effectRef>
+          <a:fontRef idx="minor">
+            <a:schemeClr val="tx1"/>
+          </a:fontRef>
+        </p:style>
+      </p:cxnSp>
+      <p:cxnSp>
+        <p:nvCxnSpPr>
+          <p:cNvPr id="33" name="直接连接符 32">
+            <a:extLst>
+              <a:ext uri="{FF2B5EF4-FFF2-40B4-BE49-F238E27FC236}">
+                <a16:creationId xmlns:a16="http://schemas.microsoft.com/office/drawing/2014/main" id="{FECB471F-C2BB-357E-78B9-F0353C2E4ACA}"/>
+              </a:ext>
+            </a:extLst>
+          </p:cNvPr>
+          <p:cNvCxnSpPr>
+            <a:cxnSpLocks/>
+          </p:cNvCxnSpPr>
+          <p:nvPr/>
+        </p:nvCxnSpPr>
+        <p:spPr>
+          <a:xfrm flipV="1">
+            <a:off x="9459532" y="1033335"/>
+            <a:ext cx="0" cy="1306521"/>
+          </a:xfrm>
+          <a:prstGeom prst="line">
+            <a:avLst/>
+          </a:prstGeom>
+        </p:spPr>
+        <p:style>
+          <a:lnRef idx="3">
+            <a:schemeClr val="accent1"/>
+          </a:lnRef>
+          <a:fillRef idx="0">
+            <a:schemeClr val="accent1"/>
+          </a:fillRef>
+          <a:effectRef idx="2">
+            <a:schemeClr val="accent1"/>
+          </a:effectRef>
+          <a:fontRef idx="minor">
+            <a:schemeClr val="tx1"/>
+          </a:fontRef>
+        </p:style>
+      </p:cxnSp>
+      <p:cxnSp>
+        <p:nvCxnSpPr>
+          <p:cNvPr id="36" name="直接箭头连接符 35">
+            <a:extLst>
+              <a:ext uri="{FF2B5EF4-FFF2-40B4-BE49-F238E27FC236}">
+                <a16:creationId xmlns:a16="http://schemas.microsoft.com/office/drawing/2014/main" id="{E380976B-2D06-EDEE-EFD0-E4D2C9EC8488}"/>
+              </a:ext>
+            </a:extLst>
+          </p:cNvPr>
+          <p:cNvCxnSpPr>
+            <a:cxnSpLocks/>
+            <a:endCxn id="4" idx="3"/>
+          </p:cNvCxnSpPr>
+          <p:nvPr/>
+        </p:nvCxnSpPr>
+        <p:spPr>
+          <a:xfrm flipH="1">
+            <a:off x="6350681" y="1033335"/>
+            <a:ext cx="3102412" cy="1"/>
+          </a:xfrm>
+          <a:prstGeom prst="straightConnector1">
+            <a:avLst/>
+          </a:prstGeom>
+          <a:ln>
+            <a:tailEnd type="triangle"/>
+          </a:ln>
+        </p:spPr>
+        <p:style>
+          <a:lnRef idx="3">
+            <a:schemeClr val="accent1"/>
+          </a:lnRef>
+          <a:fillRef idx="0">
+            <a:schemeClr val="accent1"/>
+          </a:fillRef>
+          <a:effectRef idx="2">
+            <a:schemeClr val="accent1"/>
+          </a:effectRef>
+          <a:fontRef idx="minor">
+            <a:schemeClr val="tx1"/>
+          </a:fontRef>
+        </p:style>
+      </p:cxnSp>
+      <p:sp>
+        <p:nvSpPr>
+          <p:cNvPr id="41" name="文本框 40">
+            <a:extLst>
+              <a:ext uri="{FF2B5EF4-FFF2-40B4-BE49-F238E27FC236}">
+                <a16:creationId xmlns:a16="http://schemas.microsoft.com/office/drawing/2014/main" id="{05C451B8-C05E-DBF8-3DA5-53A7CBB04DFA}"/>
+              </a:ext>
+            </a:extLst>
+          </p:cNvPr>
+          <p:cNvSpPr txBox="1"/>
+          <p:nvPr/>
+        </p:nvSpPr>
+        <p:spPr>
+          <a:xfrm>
+            <a:off x="2180006" y="759628"/>
+            <a:ext cx="923802" cy="230832"/>
+          </a:xfrm>
+          <a:prstGeom prst="rect">
+            <a:avLst/>
+          </a:prstGeom>
+          <a:noFill/>
+        </p:spPr>
+        <p:txBody>
+          <a:bodyPr wrap="square" rtlCol="0">
+            <a:spAutoFit/>
+          </a:bodyPr>
+          <a:lstStyle/>
+          <a:p>
+            <a:r>
+              <a:rPr lang="en-US" altLang="zh-CN" sz="900" dirty="0"/>
+              <a:t>USB</a:t>
+            </a:r>
+            <a:endParaRPr lang="zh-CN" altLang="en-US" sz="900" dirty="0"/>
+          </a:p>
+        </p:txBody>
+      </p:sp>
+      <p:sp>
+        <p:nvSpPr>
+          <p:cNvPr id="43" name="文本框 42">
+            <a:extLst>
+              <a:ext uri="{FF2B5EF4-FFF2-40B4-BE49-F238E27FC236}">
+                <a16:creationId xmlns:a16="http://schemas.microsoft.com/office/drawing/2014/main" id="{43E90C03-0368-DB15-73A1-D0E3CE6BD465}"/>
+              </a:ext>
+            </a:extLst>
+          </p:cNvPr>
+          <p:cNvSpPr txBox="1"/>
+          <p:nvPr/>
+        </p:nvSpPr>
+        <p:spPr>
+          <a:xfrm>
+            <a:off x="7901887" y="647002"/>
+            <a:ext cx="1032164" cy="369332"/>
+          </a:xfrm>
+          <a:prstGeom prst="rect">
+            <a:avLst/>
+          </a:prstGeom>
+          <a:noFill/>
+        </p:spPr>
+        <p:txBody>
+          <a:bodyPr wrap="square" rtlCol="0">
+            <a:spAutoFit/>
+          </a:bodyPr>
+          <a:lstStyle/>
+          <a:p>
+            <a:r>
+              <a:rPr lang="en-US" altLang="zh-CN" sz="900" dirty="0"/>
+              <a:t>USB</a:t>
+            </a:r>
+            <a:r>
+              <a:rPr lang="en-US" altLang="zh-CN" dirty="0"/>
+              <a:t> </a:t>
+            </a:r>
+            <a:endParaRPr lang="zh-CN" altLang="en-US" dirty="0"/>
+          </a:p>
+        </p:txBody>
+      </p:sp>
+      <p:sp>
+        <p:nvSpPr>
+          <p:cNvPr id="44" name="文本框 43">
+            <a:extLst>
+              <a:ext uri="{FF2B5EF4-FFF2-40B4-BE49-F238E27FC236}">
+                <a16:creationId xmlns:a16="http://schemas.microsoft.com/office/drawing/2014/main" id="{CD1E069A-A048-79BC-ED7A-6B131269C142}"/>
+              </a:ext>
+            </a:extLst>
+          </p:cNvPr>
+          <p:cNvSpPr txBox="1"/>
+          <p:nvPr/>
+        </p:nvSpPr>
+        <p:spPr>
+          <a:xfrm>
+            <a:off x="5610032" y="2380779"/>
+            <a:ext cx="2811780" cy="230832"/>
+          </a:xfrm>
+          <a:prstGeom prst="rect">
+            <a:avLst/>
+          </a:prstGeom>
+          <a:noFill/>
+        </p:spPr>
+        <p:txBody>
+          <a:bodyPr wrap="square" rtlCol="0">
+            <a:spAutoFit/>
+          </a:bodyPr>
+          <a:lstStyle/>
+          <a:p>
+            <a:r>
+              <a:rPr lang="zh-CN" altLang="en-US" sz="900" dirty="0"/>
+              <a:t>以太网（</a:t>
+            </a:r>
+            <a:r>
+              <a:rPr lang="en-US" altLang="zh-CN" sz="900" dirty="0"/>
+              <a:t>WIFI</a:t>
+            </a:r>
+            <a:r>
+              <a:rPr lang="zh-CN" altLang="en-US" sz="900" dirty="0"/>
+              <a:t>）</a:t>
+            </a:r>
+            <a:r>
+              <a:rPr lang="en-US" altLang="zh-CN" sz="900" dirty="0"/>
+              <a:t>&gt;USB&gt;</a:t>
+            </a:r>
+            <a:r>
+              <a:rPr lang="zh-CN" altLang="en-US" sz="900" dirty="0"/>
+              <a:t>串口</a:t>
+            </a:r>
+          </a:p>
+        </p:txBody>
+      </p:sp>
+      <p:sp>
+        <p:nvSpPr>
+          <p:cNvPr id="47" name="矩形 46">
+            <a:extLst>
+              <a:ext uri="{FF2B5EF4-FFF2-40B4-BE49-F238E27FC236}">
+                <a16:creationId xmlns:a16="http://schemas.microsoft.com/office/drawing/2014/main" id="{ACBCA28B-9D80-9D88-CEFB-B1EA6A3D2582}"/>
+              </a:ext>
+            </a:extLst>
+          </p:cNvPr>
+          <p:cNvSpPr/>
+          <p:nvPr/>
+        </p:nvSpPr>
+        <p:spPr>
+          <a:xfrm>
+            <a:off x="5081089" y="3483147"/>
+            <a:ext cx="1070019" cy="944765"/>
+          </a:xfrm>
+          <a:prstGeom prst="rect">
+            <a:avLst/>
+          </a:prstGeom>
+        </p:spPr>
+        <p:style>
+          <a:lnRef idx="2">
+            <a:schemeClr val="accent3">
+              <a:shade val="15000"/>
+            </a:schemeClr>
+          </a:lnRef>
+          <a:fillRef idx="1">
+            <a:schemeClr val="accent3"/>
+          </a:fillRef>
+          <a:effectRef idx="0">
+            <a:schemeClr val="accent3"/>
+          </a:effectRef>
+          <a:fontRef idx="minor">
+            <a:schemeClr val="lt1"/>
+          </a:fontRef>
+        </p:style>
+        <p:txBody>
+          <a:bodyPr rtlCol="0" anchor="ctr"/>
+          <a:lstStyle/>
+          <a:p>
+            <a:pPr algn="ctr"/>
+            <a:r>
+              <a:rPr lang="en-US" altLang="zh-CN" sz="1050" dirty="0"/>
+              <a:t>Renesas</a:t>
+            </a:r>
+          </a:p>
+          <a:p>
+            <a:pPr algn="ctr"/>
+            <a:r>
+              <a:rPr lang="en-US" altLang="zh-CN" dirty="0"/>
+              <a:t>RA6M5</a:t>
+            </a:r>
+            <a:r>
+              <a:rPr lang="zh-CN" altLang="en-US" dirty="0"/>
+              <a:t>或</a:t>
+            </a:r>
+            <a:r>
+              <a:rPr lang="en-US" altLang="zh-CN" dirty="0"/>
+              <a:t>RA8P1</a:t>
+            </a:r>
+            <a:endParaRPr lang="zh-CN" altLang="en-US" dirty="0"/>
+          </a:p>
+        </p:txBody>
+      </p:sp>
+      <p:cxnSp>
+        <p:nvCxnSpPr>
+          <p:cNvPr id="64" name="直接箭头连接符 63">
+            <a:extLst>
+              <a:ext uri="{FF2B5EF4-FFF2-40B4-BE49-F238E27FC236}">
+                <a16:creationId xmlns:a16="http://schemas.microsoft.com/office/drawing/2014/main" id="{ECDE82D9-9B61-1675-B9B8-C99BCAB53A37}"/>
+              </a:ext>
+            </a:extLst>
+          </p:cNvPr>
+          <p:cNvCxnSpPr/>
+          <p:nvPr/>
+        </p:nvCxnSpPr>
+        <p:spPr>
+          <a:xfrm>
+            <a:off x="2307050" y="3662152"/>
+            <a:ext cx="1847776" cy="0"/>
+          </a:xfrm>
+          <a:prstGeom prst="straightConnector1">
+            <a:avLst/>
+          </a:prstGeom>
+          <a:ln>
+            <a:tailEnd type="triangle"/>
+          </a:ln>
+        </p:spPr>
+        <p:style>
+          <a:lnRef idx="3">
+            <a:schemeClr val="dk1"/>
+          </a:lnRef>
+          <a:fillRef idx="0">
+            <a:schemeClr val="dk1"/>
+          </a:fillRef>
+          <a:effectRef idx="2">
+            <a:schemeClr val="dk1"/>
+          </a:effectRef>
+          <a:fontRef idx="minor">
+            <a:schemeClr val="tx1"/>
+          </a:fontRef>
+        </p:style>
+      </p:cxnSp>
+      <p:cxnSp>
+        <p:nvCxnSpPr>
+          <p:cNvPr id="66" name="直接连接符 65">
+            <a:extLst>
+              <a:ext uri="{FF2B5EF4-FFF2-40B4-BE49-F238E27FC236}">
+                <a16:creationId xmlns:a16="http://schemas.microsoft.com/office/drawing/2014/main" id="{BDBF43E8-6365-9A02-49A8-301D819C59EB}"/>
+              </a:ext>
+            </a:extLst>
+          </p:cNvPr>
+          <p:cNvCxnSpPr>
+            <a:cxnSpLocks/>
+          </p:cNvCxnSpPr>
+          <p:nvPr/>
+        </p:nvCxnSpPr>
+        <p:spPr>
+          <a:xfrm>
+            <a:off x="7873338" y="3246480"/>
+            <a:ext cx="0" cy="135786"/>
+          </a:xfrm>
+          <a:prstGeom prst="line">
+            <a:avLst/>
+          </a:prstGeom>
+        </p:spPr>
+        <p:style>
+          <a:lnRef idx="3">
+            <a:schemeClr val="dk1"/>
+          </a:lnRef>
+          <a:fillRef idx="0">
+            <a:schemeClr val="dk1"/>
+          </a:fillRef>
+          <a:effectRef idx="2">
+            <a:schemeClr val="dk1"/>
+          </a:effectRef>
+          <a:fontRef idx="minor">
+            <a:schemeClr val="tx1"/>
+          </a:fontRef>
+        </p:style>
+      </p:cxnSp>
+      <p:cxnSp>
+        <p:nvCxnSpPr>
+          <p:cNvPr id="72" name="直接连接符 71">
+            <a:extLst>
+              <a:ext uri="{FF2B5EF4-FFF2-40B4-BE49-F238E27FC236}">
+                <a16:creationId xmlns:a16="http://schemas.microsoft.com/office/drawing/2014/main" id="{A639A803-477B-4DEE-A4E2-8650EE0B2C9A}"/>
+              </a:ext>
+            </a:extLst>
+          </p:cNvPr>
+          <p:cNvCxnSpPr>
+            <a:cxnSpLocks/>
+          </p:cNvCxnSpPr>
+          <p:nvPr/>
+        </p:nvCxnSpPr>
+        <p:spPr>
+          <a:xfrm>
+            <a:off x="8051856" y="3237175"/>
+            <a:ext cx="0" cy="135786"/>
+          </a:xfrm>
+          <a:prstGeom prst="line">
+            <a:avLst/>
+          </a:prstGeom>
+        </p:spPr>
+        <p:style>
+          <a:lnRef idx="3">
+            <a:schemeClr val="dk1"/>
+          </a:lnRef>
+          <a:fillRef idx="0">
+            <a:schemeClr val="dk1"/>
+          </a:fillRef>
+          <a:effectRef idx="2">
+            <a:schemeClr val="dk1"/>
+          </a:effectRef>
+          <a:fontRef idx="minor">
+            <a:schemeClr val="tx1"/>
+          </a:fontRef>
+        </p:style>
+      </p:cxnSp>
+      <p:cxnSp>
+        <p:nvCxnSpPr>
+          <p:cNvPr id="74" name="直接连接符 73">
+            <a:extLst>
+              <a:ext uri="{FF2B5EF4-FFF2-40B4-BE49-F238E27FC236}">
+                <a16:creationId xmlns:a16="http://schemas.microsoft.com/office/drawing/2014/main" id="{C51E8E91-A8C5-24D4-3B41-761C6A33A96A}"/>
+              </a:ext>
+            </a:extLst>
+          </p:cNvPr>
+          <p:cNvCxnSpPr>
+            <a:cxnSpLocks/>
+          </p:cNvCxnSpPr>
+          <p:nvPr/>
+        </p:nvCxnSpPr>
+        <p:spPr>
+          <a:xfrm>
+            <a:off x="8237099" y="3241284"/>
+            <a:ext cx="0" cy="144909"/>
+          </a:xfrm>
+          <a:prstGeom prst="line">
+            <a:avLst/>
+          </a:prstGeom>
+        </p:spPr>
+        <p:style>
+          <a:lnRef idx="3">
+            <a:schemeClr val="dk1"/>
+          </a:lnRef>
+          <a:fillRef idx="0">
+            <a:schemeClr val="dk1"/>
+          </a:fillRef>
+          <a:effectRef idx="2">
+            <a:schemeClr val="dk1"/>
+          </a:effectRef>
+          <a:fontRef idx="minor">
+            <a:schemeClr val="tx1"/>
+          </a:fontRef>
+        </p:style>
+      </p:cxnSp>
+      <p:cxnSp>
+        <p:nvCxnSpPr>
+          <p:cNvPr id="82" name="直接连接符 81">
+            <a:extLst>
+              <a:ext uri="{FF2B5EF4-FFF2-40B4-BE49-F238E27FC236}">
+                <a16:creationId xmlns:a16="http://schemas.microsoft.com/office/drawing/2014/main" id="{12A6A93D-621C-A718-98CA-CD0F0A3C74B0}"/>
+              </a:ext>
+            </a:extLst>
+          </p:cNvPr>
+          <p:cNvCxnSpPr>
+            <a:cxnSpLocks/>
+          </p:cNvCxnSpPr>
+          <p:nvPr/>
+        </p:nvCxnSpPr>
+        <p:spPr>
+          <a:xfrm>
+            <a:off x="8422342" y="3250953"/>
+            <a:ext cx="0" cy="135240"/>
+          </a:xfrm>
+          <a:prstGeom prst="line">
+            <a:avLst/>
+          </a:prstGeom>
+        </p:spPr>
+        <p:style>
+          <a:lnRef idx="3">
+            <a:schemeClr val="dk1"/>
+          </a:lnRef>
+          <a:fillRef idx="0">
+            <a:schemeClr val="dk1"/>
+          </a:fillRef>
+          <a:effectRef idx="2">
+            <a:schemeClr val="dk1"/>
+          </a:effectRef>
+          <a:fontRef idx="minor">
+            <a:schemeClr val="tx1"/>
+          </a:fontRef>
+        </p:style>
+      </p:cxnSp>
+      <p:cxnSp>
+        <p:nvCxnSpPr>
+          <p:cNvPr id="86" name="直接连接符 85">
+            <a:extLst>
+              <a:ext uri="{FF2B5EF4-FFF2-40B4-BE49-F238E27FC236}">
+                <a16:creationId xmlns:a16="http://schemas.microsoft.com/office/drawing/2014/main" id="{B23845B6-5C0E-CC96-3912-534B6F063675}"/>
+              </a:ext>
+            </a:extLst>
+          </p:cNvPr>
+          <p:cNvCxnSpPr>
+            <a:cxnSpLocks/>
+          </p:cNvCxnSpPr>
+          <p:nvPr/>
+        </p:nvCxnSpPr>
+        <p:spPr>
+          <a:xfrm>
+            <a:off x="7873338" y="4330958"/>
+            <a:ext cx="0" cy="135786"/>
+          </a:xfrm>
+          <a:prstGeom prst="line">
+            <a:avLst/>
+          </a:prstGeom>
+        </p:spPr>
+        <p:style>
+          <a:lnRef idx="3">
+            <a:schemeClr val="dk1"/>
+          </a:lnRef>
+          <a:fillRef idx="0">
+            <a:schemeClr val="dk1"/>
+          </a:fillRef>
+          <a:effectRef idx="2">
+            <a:schemeClr val="dk1"/>
+          </a:effectRef>
+          <a:fontRef idx="minor">
+            <a:schemeClr val="tx1"/>
+          </a:fontRef>
+        </p:style>
+      </p:cxnSp>
+      <p:cxnSp>
+        <p:nvCxnSpPr>
+          <p:cNvPr id="87" name="直接连接符 86">
+            <a:extLst>
+              <a:ext uri="{FF2B5EF4-FFF2-40B4-BE49-F238E27FC236}">
+                <a16:creationId xmlns:a16="http://schemas.microsoft.com/office/drawing/2014/main" id="{7BEB2AC8-FD17-1F95-3E91-0E11FEBFE00F}"/>
+              </a:ext>
+            </a:extLst>
+          </p:cNvPr>
+          <p:cNvCxnSpPr>
+            <a:cxnSpLocks/>
+          </p:cNvCxnSpPr>
+          <p:nvPr/>
+        </p:nvCxnSpPr>
+        <p:spPr>
+          <a:xfrm>
+            <a:off x="8052110" y="4330958"/>
+            <a:ext cx="0" cy="135786"/>
+          </a:xfrm>
+          <a:prstGeom prst="line">
+            <a:avLst/>
+          </a:prstGeom>
+        </p:spPr>
+        <p:style>
+          <a:lnRef idx="3">
+            <a:schemeClr val="dk1"/>
+          </a:lnRef>
+          <a:fillRef idx="0">
+            <a:schemeClr val="dk1"/>
+          </a:fillRef>
+          <a:effectRef idx="2">
+            <a:schemeClr val="dk1"/>
+          </a:effectRef>
+          <a:fontRef idx="minor">
+            <a:schemeClr val="tx1"/>
+          </a:fontRef>
+        </p:style>
+      </p:cxnSp>
+      <p:cxnSp>
+        <p:nvCxnSpPr>
+          <p:cNvPr id="89" name="直接连接符 88">
+            <a:extLst>
+              <a:ext uri="{FF2B5EF4-FFF2-40B4-BE49-F238E27FC236}">
+                <a16:creationId xmlns:a16="http://schemas.microsoft.com/office/drawing/2014/main" id="{192EA196-6EE7-1C1E-7C31-71E9057FDD1D}"/>
+              </a:ext>
+            </a:extLst>
+          </p:cNvPr>
+          <p:cNvCxnSpPr>
+            <a:cxnSpLocks/>
+          </p:cNvCxnSpPr>
+          <p:nvPr/>
+        </p:nvCxnSpPr>
+        <p:spPr>
+          <a:xfrm>
+            <a:off x="8247712" y="4330958"/>
+            <a:ext cx="0" cy="135786"/>
+          </a:xfrm>
+          <a:prstGeom prst="line">
+            <a:avLst/>
+          </a:prstGeom>
+        </p:spPr>
+        <p:style>
+          <a:lnRef idx="3">
+            <a:schemeClr val="dk1"/>
+          </a:lnRef>
+          <a:fillRef idx="0">
+            <a:schemeClr val="dk1"/>
+          </a:fillRef>
+          <a:effectRef idx="2">
+            <a:schemeClr val="dk1"/>
+          </a:effectRef>
+          <a:fontRef idx="minor">
+            <a:schemeClr val="tx1"/>
+          </a:fontRef>
+        </p:style>
+      </p:cxnSp>
+      <p:cxnSp>
+        <p:nvCxnSpPr>
+          <p:cNvPr id="90" name="直接连接符 89">
+            <a:extLst>
+              <a:ext uri="{FF2B5EF4-FFF2-40B4-BE49-F238E27FC236}">
+                <a16:creationId xmlns:a16="http://schemas.microsoft.com/office/drawing/2014/main" id="{DB0F4C7C-A7B6-72E5-AB54-C999B517B3E0}"/>
+              </a:ext>
+            </a:extLst>
+          </p:cNvPr>
+          <p:cNvCxnSpPr>
+            <a:cxnSpLocks/>
+          </p:cNvCxnSpPr>
+          <p:nvPr/>
+        </p:nvCxnSpPr>
+        <p:spPr>
+          <a:xfrm>
+            <a:off x="8422342" y="4336556"/>
+            <a:ext cx="0" cy="135786"/>
+          </a:xfrm>
+          <a:prstGeom prst="line">
+            <a:avLst/>
+          </a:prstGeom>
+        </p:spPr>
+        <p:style>
+          <a:lnRef idx="3">
+            <a:schemeClr val="dk1"/>
+          </a:lnRef>
+          <a:fillRef idx="0">
+            <a:schemeClr val="dk1"/>
+          </a:fillRef>
+          <a:effectRef idx="2">
+            <a:schemeClr val="dk1"/>
+          </a:effectRef>
+          <a:fontRef idx="minor">
+            <a:schemeClr val="tx1"/>
+          </a:fontRef>
+        </p:style>
+      </p:cxnSp>
+      <p:cxnSp>
+        <p:nvCxnSpPr>
+          <p:cNvPr id="91" name="直接连接符 90">
+            <a:extLst>
+              <a:ext uri="{FF2B5EF4-FFF2-40B4-BE49-F238E27FC236}">
+                <a16:creationId xmlns:a16="http://schemas.microsoft.com/office/drawing/2014/main" id="{362C36B3-A79C-0ED2-FA92-6ED2B691B635}"/>
+              </a:ext>
+            </a:extLst>
+          </p:cNvPr>
+          <p:cNvCxnSpPr>
+            <a:cxnSpLocks/>
+          </p:cNvCxnSpPr>
+          <p:nvPr/>
+        </p:nvCxnSpPr>
+        <p:spPr>
+          <a:xfrm>
+            <a:off x="7510984" y="3586786"/>
+            <a:ext cx="134441" cy="0"/>
+          </a:xfrm>
+          <a:prstGeom prst="line">
+            <a:avLst/>
+          </a:prstGeom>
+        </p:spPr>
+        <p:style>
+          <a:lnRef idx="3">
+            <a:schemeClr val="dk1"/>
+          </a:lnRef>
+          <a:fillRef idx="0">
+            <a:schemeClr val="dk1"/>
+          </a:fillRef>
+          <a:effectRef idx="2">
+            <a:schemeClr val="dk1"/>
+          </a:effectRef>
+          <a:fontRef idx="minor">
+            <a:schemeClr val="tx1"/>
+          </a:fontRef>
+        </p:style>
+      </p:cxnSp>
+      <p:cxnSp>
+        <p:nvCxnSpPr>
+          <p:cNvPr id="93" name="直接连接符 92">
+            <a:extLst>
+              <a:ext uri="{FF2B5EF4-FFF2-40B4-BE49-F238E27FC236}">
+                <a16:creationId xmlns:a16="http://schemas.microsoft.com/office/drawing/2014/main" id="{3436E61D-19FC-443D-841D-C0E477EC3B93}"/>
+              </a:ext>
+            </a:extLst>
+          </p:cNvPr>
+          <p:cNvCxnSpPr>
+            <a:cxnSpLocks/>
+          </p:cNvCxnSpPr>
+          <p:nvPr/>
+        </p:nvCxnSpPr>
+        <p:spPr>
+          <a:xfrm>
+            <a:off x="7518078" y="4044640"/>
+            <a:ext cx="140556" cy="0"/>
+          </a:xfrm>
+          <a:prstGeom prst="line">
+            <a:avLst/>
+          </a:prstGeom>
+        </p:spPr>
+        <p:style>
+          <a:lnRef idx="3">
+            <a:schemeClr val="dk1"/>
+          </a:lnRef>
+          <a:fillRef idx="0">
+            <a:schemeClr val="dk1"/>
+          </a:fillRef>
+          <a:effectRef idx="2">
+            <a:schemeClr val="dk1"/>
+          </a:effectRef>
+          <a:fontRef idx="minor">
+            <a:schemeClr val="tx1"/>
+          </a:fontRef>
+        </p:style>
+      </p:cxnSp>
+      <p:sp>
+        <p:nvSpPr>
+          <p:cNvPr id="99" name="文本框 98">
+            <a:extLst>
+              <a:ext uri="{FF2B5EF4-FFF2-40B4-BE49-F238E27FC236}">
+                <a16:creationId xmlns:a16="http://schemas.microsoft.com/office/drawing/2014/main" id="{EE130269-EEC7-4F89-1580-A5FAA29800E2}"/>
+              </a:ext>
+            </a:extLst>
+          </p:cNvPr>
+          <p:cNvSpPr txBox="1"/>
+          <p:nvPr/>
+        </p:nvSpPr>
+        <p:spPr>
+          <a:xfrm>
+            <a:off x="5255977" y="4662647"/>
+            <a:ext cx="1094704" cy="369332"/>
+          </a:xfrm>
+          <a:prstGeom prst="rect">
+            <a:avLst/>
+          </a:prstGeom>
+          <a:noFill/>
+        </p:spPr>
+        <p:txBody>
+          <a:bodyPr wrap="square" rtlCol="0">
+            <a:spAutoFit/>
+          </a:bodyPr>
+          <a:lstStyle/>
+          <a:p>
+            <a:r>
+              <a:rPr lang="zh-CN" altLang="en-US" dirty="0">
+                <a:highlight>
+                  <a:srgbClr val="FFFF00"/>
+                </a:highlight>
+              </a:rPr>
+              <a:t>主机</a:t>
+            </a:r>
+          </a:p>
+        </p:txBody>
+      </p:sp>
+      <p:sp>
+        <p:nvSpPr>
+          <p:cNvPr id="100" name="文本框 99">
+            <a:extLst>
+              <a:ext uri="{FF2B5EF4-FFF2-40B4-BE49-F238E27FC236}">
+                <a16:creationId xmlns:a16="http://schemas.microsoft.com/office/drawing/2014/main" id="{9670AF51-F479-7DD5-7489-DBB926F78229}"/>
+              </a:ext>
+            </a:extLst>
+          </p:cNvPr>
+          <p:cNvSpPr txBox="1"/>
+          <p:nvPr/>
+        </p:nvSpPr>
+        <p:spPr>
+          <a:xfrm>
+            <a:off x="7859597" y="4599325"/>
+            <a:ext cx="862885" cy="369332"/>
+          </a:xfrm>
+          <a:prstGeom prst="rect">
+            <a:avLst/>
+          </a:prstGeom>
+          <a:noFill/>
+        </p:spPr>
+        <p:txBody>
+          <a:bodyPr wrap="square" rtlCol="0">
+            <a:spAutoFit/>
+          </a:bodyPr>
+          <a:lstStyle/>
+          <a:p>
+            <a:r>
+              <a:rPr lang="zh-CN" altLang="en-US" dirty="0">
+                <a:highlight>
+                  <a:srgbClr val="FFFF00"/>
+                </a:highlight>
+              </a:rPr>
+              <a:t>从机</a:t>
+            </a:r>
+          </a:p>
+        </p:txBody>
+      </p:sp>
+      <p:cxnSp>
+        <p:nvCxnSpPr>
+          <p:cNvPr id="104" name="直接箭头连接符 103">
+            <a:extLst>
+              <a:ext uri="{FF2B5EF4-FFF2-40B4-BE49-F238E27FC236}">
+                <a16:creationId xmlns:a16="http://schemas.microsoft.com/office/drawing/2014/main" id="{49105FFE-99C9-956B-4E29-683C527554DB}"/>
+              </a:ext>
+            </a:extLst>
+          </p:cNvPr>
+          <p:cNvCxnSpPr>
+            <a:cxnSpLocks/>
+          </p:cNvCxnSpPr>
+          <p:nvPr/>
+        </p:nvCxnSpPr>
+        <p:spPr>
+          <a:xfrm flipH="1">
+            <a:off x="8722482" y="3626221"/>
+            <a:ext cx="1220852" cy="0"/>
+          </a:xfrm>
+          <a:prstGeom prst="straightConnector1">
+            <a:avLst/>
+          </a:prstGeom>
+          <a:ln>
+            <a:tailEnd type="triangle"/>
+          </a:ln>
+        </p:spPr>
+        <p:style>
+          <a:lnRef idx="3">
+            <a:schemeClr val="dk1"/>
+          </a:lnRef>
+          <a:fillRef idx="0">
+            <a:schemeClr val="dk1"/>
+          </a:fillRef>
+          <a:effectRef idx="2">
+            <a:schemeClr val="dk1"/>
+          </a:effectRef>
+          <a:fontRef idx="minor">
+            <a:schemeClr val="tx1"/>
+          </a:fontRef>
+        </p:style>
+      </p:cxnSp>
+      <p:cxnSp>
+        <p:nvCxnSpPr>
+          <p:cNvPr id="138" name="直接箭头连接符 137">
+            <a:extLst>
+              <a:ext uri="{FF2B5EF4-FFF2-40B4-BE49-F238E27FC236}">
+                <a16:creationId xmlns:a16="http://schemas.microsoft.com/office/drawing/2014/main" id="{686DB90C-87D5-8B3F-F121-3EC2600871C8}"/>
+              </a:ext>
+            </a:extLst>
+          </p:cNvPr>
+          <p:cNvCxnSpPr/>
+          <p:nvPr/>
+        </p:nvCxnSpPr>
+        <p:spPr>
+          <a:xfrm>
+            <a:off x="6350681" y="3891914"/>
+            <a:ext cx="1167397" cy="0"/>
+          </a:xfrm>
+          <a:prstGeom prst="straightConnector1">
+            <a:avLst/>
+          </a:prstGeom>
+          <a:ln>
+            <a:headEnd type="arrow" w="med" len="med"/>
+            <a:tailEnd type="arrow" w="med" len="med"/>
+          </a:ln>
+        </p:spPr>
+        <p:style>
+          <a:lnRef idx="3">
+            <a:schemeClr val="accent2"/>
+          </a:lnRef>
+          <a:fillRef idx="0">
+            <a:schemeClr val="accent2"/>
+          </a:fillRef>
+          <a:effectRef idx="2">
+            <a:schemeClr val="accent2"/>
           </a:effectRef>
           <a:fontRef idx="minor">
             <a:schemeClr val="tx1"/>
